--- a/assets/figures-editable/c1-c2/c1-e07.pptx
+++ b/assets/figures-editable/c1-c2/c1-e07.pptx
@@ -7,7 +7,7 @@
   <p:sldIdLst>
     <p:sldId id="256" r:id="rId7"/>
   </p:sldIdLst>
-  <p:sldSz cx="11948160" cy="7924799" type="screen4x3"/>
+  <p:sldSz cx="12191695" cy="6858000" type="screen4x3"/>
   <p:notesSz cx="6858000" cy="9144000"/>
   <p:defaultTextStyle>
     <a:defPPr>
@@ -3098,14 +3098,14 @@
       <p:grpSpPr/>
       <p:sp>
         <p:nvSpPr>
-          <p:cNvPr id="2" name="text1" descr="sci-ppt:C1-E07-001"/>
+          <p:cNvPr id="2" name="C1-E07 text 0" descr="sci-ppt:o000"/>
           <p:cNvSpPr txBox="1"/>
           <p:nvPr/>
         </p:nvSpPr>
         <p:spPr>
           <a:xfrm>
-            <a:off x="316992" y="268224"/>
-            <a:ext cx="11277600" cy="359054"/>
+            <a:off x="274320" y="118872"/>
+            <a:ext cx="11612880" cy="340105"/>
           </a:xfrm>
           <a:prstGeom prst="rect">
             <a:avLst/>
@@ -3114,7 +3114,7 @@
           <a:effectLst/>
         </p:spPr>
         <p:txBody>
-          <a:bodyPr wrap="none" lIns="27432" rIns="27432" tIns="18288" bIns="18288" anchor="ctr">
+          <a:bodyPr wrap="none" lIns="18288" rIns="18288" tIns="18288" bIns="18288" anchor="t">
             <a:spAutoFit/>
           </a:bodyPr>
           <a:lstStyle/>
@@ -3125,83 +3125,1876 @@
               </a:spcAft>
             </a:pPr>
             <a:r>
-              <a:rPr sz="1823" b="0" i="0">
+              <a:rPr sz="1900" b="1" i="0">
                 <a:solidFill>
                   <a:srgbClr val="8EDBD4"/>
                 </a:solidFill>
                 <a:latin typeface="Arial"/>
               </a:rPr>
-              <a:t>C1-E07 | Physical-variable diagram</a:t>
-            </a:r>
-          </a:p>
-        </p:txBody>
-      </p:sp>
-      <p:sp>
-        <p:nvSpPr>
-          <p:cNvPr id="3" name="ellipse2" descr="sci-ppt:C1-E07-002"/>
+              <a:t>C1-E07 · Rayleigh–Plesset under the declared assumptions</a:t>
+            </a:r>
+          </a:p>
+        </p:txBody>
+      </p:sp>
+      <p:cxnSp>
+        <p:nvCxnSpPr>
+          <p:cNvPr id="3" name="C1-E07 line 1" descr="sci-ppt:o001"/>
+          <p:cNvCxnSpPr/>
+          <p:nvPr/>
+        </p:nvCxnSpPr>
+        <p:spPr>
+          <a:xfrm>
+            <a:off x="868680" y="4937760"/>
+            <a:ext cx="5760720" cy="0"/>
+          </a:xfrm>
+          <a:prstGeom prst="line">
+            <a:avLst/>
+          </a:prstGeom>
+          <a:ln w="19050">
+            <a:solidFill>
+              <a:srgbClr val="B4C7D2"/>
+            </a:solidFill>
+          </a:ln>
+          <a:effectLst/>
+        </p:spPr>
+      </p:cxnSp>
+      <p:cxnSp>
+        <p:nvCxnSpPr>
+          <p:cNvPr id="4" name="C1-E07 line 2" descr="sci-ppt:o002"/>
+          <p:cNvCxnSpPr/>
+          <p:nvPr/>
+        </p:nvCxnSpPr>
+        <p:spPr>
+          <a:xfrm>
+            <a:off x="868680" y="1371600"/>
+            <a:ext cx="0" cy="3566160"/>
+          </a:xfrm>
+          <a:prstGeom prst="line">
+            <a:avLst/>
+          </a:prstGeom>
+          <a:ln w="19050">
+            <a:solidFill>
+              <a:srgbClr val="B4C7D2"/>
+            </a:solidFill>
+          </a:ln>
+          <a:effectLst/>
+        </p:spPr>
+      </p:cxnSp>
+      <p:cxnSp>
+        <p:nvCxnSpPr>
+          <p:cNvPr id="5" name="C1-E07 line 3" descr="sci-ppt:o003"/>
+          <p:cNvCxnSpPr/>
+          <p:nvPr/>
+        </p:nvCxnSpPr>
+        <p:spPr>
+          <a:xfrm>
+            <a:off x="868680" y="4937760"/>
+            <a:ext cx="0" cy="64008"/>
+          </a:xfrm>
+          <a:prstGeom prst="line">
+            <a:avLst/>
+          </a:prstGeom>
+          <a:ln w="12700">
+            <a:solidFill>
+              <a:srgbClr val="B4C7D2"/>
+            </a:solidFill>
+          </a:ln>
+          <a:effectLst/>
+        </p:spPr>
+      </p:cxnSp>
+      <p:cxnSp>
+        <p:nvCxnSpPr>
+          <p:cNvPr id="6" name="C1-E07 line 4" descr="sci-ppt:o004"/>
+          <p:cNvCxnSpPr/>
+          <p:nvPr/>
+        </p:nvCxnSpPr>
+        <p:spPr>
+          <a:xfrm>
+            <a:off x="868680" y="1371600"/>
+            <a:ext cx="0" cy="3566160"/>
+          </a:xfrm>
+          <a:prstGeom prst="line">
+            <a:avLst/>
+          </a:prstGeom>
+          <a:ln w="7620">
+            <a:solidFill>
+              <a:srgbClr val="2E4756"/>
+            </a:solidFill>
+          </a:ln>
+          <a:effectLst/>
+        </p:spPr>
+      </p:cxnSp>
+      <p:sp>
+        <p:nvSpPr>
+          <p:cNvPr id="7" name="C1-E07 text 5" descr="sci-ppt:o005"/>
+          <p:cNvSpPr txBox="1"/>
+          <p:nvPr/>
+        </p:nvSpPr>
+        <p:spPr>
+          <a:xfrm>
+            <a:off x="411479" y="5020056"/>
+            <a:ext cx="914400" cy="208407"/>
+          </a:xfrm>
+          <a:prstGeom prst="rect">
+            <a:avLst/>
+          </a:prstGeom>
+          <a:noFill/>
+          <a:effectLst/>
+        </p:spPr>
+        <p:txBody>
+          <a:bodyPr wrap="none" lIns="18288" rIns="18288" tIns="18288" bIns="18288" anchor="t">
+            <a:spAutoFit/>
+          </a:bodyPr>
+          <a:lstStyle/>
+          <a:p>
+            <a:pPr algn="ctr">
+              <a:spcAft>
+                <a:spcPts val="0"/>
+              </a:spcAft>
+            </a:pPr>
+            <a:r>
+              <a:rPr sz="1050" b="0" i="0">
+                <a:solidFill>
+                  <a:srgbClr val="B4C7D2"/>
+                </a:solidFill>
+                <a:latin typeface="Arial"/>
+              </a:rPr>
+              <a:t>0.0</a:t>
+            </a:r>
+          </a:p>
+        </p:txBody>
+      </p:sp>
+      <p:cxnSp>
+        <p:nvCxnSpPr>
+          <p:cNvPr id="8" name="C1-E07 line 6" descr="sci-ppt:o006"/>
+          <p:cNvCxnSpPr/>
+          <p:nvPr/>
+        </p:nvCxnSpPr>
+        <p:spPr>
+          <a:xfrm>
+            <a:off x="2788920" y="4937760"/>
+            <a:ext cx="0" cy="64008"/>
+          </a:xfrm>
+          <a:prstGeom prst="line">
+            <a:avLst/>
+          </a:prstGeom>
+          <a:ln w="12700">
+            <a:solidFill>
+              <a:srgbClr val="B4C7D2"/>
+            </a:solidFill>
+          </a:ln>
+          <a:effectLst/>
+        </p:spPr>
+      </p:cxnSp>
+      <p:cxnSp>
+        <p:nvCxnSpPr>
+          <p:cNvPr id="9" name="C1-E07 line 7" descr="sci-ppt:o007"/>
+          <p:cNvCxnSpPr/>
+          <p:nvPr/>
+        </p:nvCxnSpPr>
+        <p:spPr>
+          <a:xfrm>
+            <a:off x="2788920" y="1371600"/>
+            <a:ext cx="0" cy="3566160"/>
+          </a:xfrm>
+          <a:prstGeom prst="line">
+            <a:avLst/>
+          </a:prstGeom>
+          <a:ln w="7620">
+            <a:solidFill>
+              <a:srgbClr val="2E4756"/>
+            </a:solidFill>
+          </a:ln>
+          <a:effectLst/>
+        </p:spPr>
+      </p:cxnSp>
+      <p:sp>
+        <p:nvSpPr>
+          <p:cNvPr id="10" name="C1-E07 text 8" descr="sci-ppt:o008"/>
+          <p:cNvSpPr txBox="1"/>
+          <p:nvPr/>
+        </p:nvSpPr>
+        <p:spPr>
+          <a:xfrm>
+            <a:off x="2331720" y="5020056"/>
+            <a:ext cx="914400" cy="208407"/>
+          </a:xfrm>
+          <a:prstGeom prst="rect">
+            <a:avLst/>
+          </a:prstGeom>
+          <a:noFill/>
+          <a:effectLst/>
+        </p:spPr>
+        <p:txBody>
+          <a:bodyPr wrap="none" lIns="18288" rIns="18288" tIns="18288" bIns="18288" anchor="t">
+            <a:spAutoFit/>
+          </a:bodyPr>
+          <a:lstStyle/>
+          <a:p>
+            <a:pPr algn="ctr">
+              <a:spcAft>
+                <a:spcPts val="0"/>
+              </a:spcAft>
+            </a:pPr>
+            <a:r>
+              <a:rPr sz="1050" b="0" i="0">
+                <a:solidFill>
+                  <a:srgbClr val="B4C7D2"/>
+                </a:solidFill>
+                <a:latin typeface="Arial"/>
+              </a:rPr>
+              <a:t>0.5</a:t>
+            </a:r>
+          </a:p>
+        </p:txBody>
+      </p:sp>
+      <p:cxnSp>
+        <p:nvCxnSpPr>
+          <p:cNvPr id="11" name="C1-E07 line 9" descr="sci-ppt:o009"/>
+          <p:cNvCxnSpPr/>
+          <p:nvPr/>
+        </p:nvCxnSpPr>
+        <p:spPr>
+          <a:xfrm>
+            <a:off x="4709159" y="4937760"/>
+            <a:ext cx="0" cy="64008"/>
+          </a:xfrm>
+          <a:prstGeom prst="line">
+            <a:avLst/>
+          </a:prstGeom>
+          <a:ln w="12700">
+            <a:solidFill>
+              <a:srgbClr val="B4C7D2"/>
+            </a:solidFill>
+          </a:ln>
+          <a:effectLst/>
+        </p:spPr>
+      </p:cxnSp>
+      <p:cxnSp>
+        <p:nvCxnSpPr>
+          <p:cNvPr id="12" name="C1-E07 line 10" descr="sci-ppt:o010"/>
+          <p:cNvCxnSpPr/>
+          <p:nvPr/>
+        </p:nvCxnSpPr>
+        <p:spPr>
+          <a:xfrm>
+            <a:off x="4709159" y="1371600"/>
+            <a:ext cx="0" cy="3566160"/>
+          </a:xfrm>
+          <a:prstGeom prst="line">
+            <a:avLst/>
+          </a:prstGeom>
+          <a:ln w="7620">
+            <a:solidFill>
+              <a:srgbClr val="2E4756"/>
+            </a:solidFill>
+          </a:ln>
+          <a:effectLst/>
+        </p:spPr>
+      </p:cxnSp>
+      <p:sp>
+        <p:nvSpPr>
+          <p:cNvPr id="13" name="C1-E07 text 11" descr="sci-ppt:o011"/>
+          <p:cNvSpPr txBox="1"/>
+          <p:nvPr/>
+        </p:nvSpPr>
+        <p:spPr>
+          <a:xfrm>
+            <a:off x="4251959" y="5020056"/>
+            <a:ext cx="914400" cy="208407"/>
+          </a:xfrm>
+          <a:prstGeom prst="rect">
+            <a:avLst/>
+          </a:prstGeom>
+          <a:noFill/>
+          <a:effectLst/>
+        </p:spPr>
+        <p:txBody>
+          <a:bodyPr wrap="none" lIns="18288" rIns="18288" tIns="18288" bIns="18288" anchor="t">
+            <a:spAutoFit/>
+          </a:bodyPr>
+          <a:lstStyle/>
+          <a:p>
+            <a:pPr algn="ctr">
+              <a:spcAft>
+                <a:spcPts val="0"/>
+              </a:spcAft>
+            </a:pPr>
+            <a:r>
+              <a:rPr sz="1050" b="0" i="0">
+                <a:solidFill>
+                  <a:srgbClr val="B4C7D2"/>
+                </a:solidFill>
+                <a:latin typeface="Arial"/>
+              </a:rPr>
+              <a:t>1.0</a:t>
+            </a:r>
+          </a:p>
+        </p:txBody>
+      </p:sp>
+      <p:cxnSp>
+        <p:nvCxnSpPr>
+          <p:cNvPr id="14" name="C1-E07 line 12" descr="sci-ppt:o012"/>
+          <p:cNvCxnSpPr/>
+          <p:nvPr/>
+        </p:nvCxnSpPr>
+        <p:spPr>
+          <a:xfrm>
+            <a:off x="6629400" y="4937760"/>
+            <a:ext cx="0" cy="64008"/>
+          </a:xfrm>
+          <a:prstGeom prst="line">
+            <a:avLst/>
+          </a:prstGeom>
+          <a:ln w="12700">
+            <a:solidFill>
+              <a:srgbClr val="B4C7D2"/>
+            </a:solidFill>
+          </a:ln>
+          <a:effectLst/>
+        </p:spPr>
+      </p:cxnSp>
+      <p:cxnSp>
+        <p:nvCxnSpPr>
+          <p:cNvPr id="15" name="C1-E07 line 13" descr="sci-ppt:o013"/>
+          <p:cNvCxnSpPr/>
+          <p:nvPr/>
+        </p:nvCxnSpPr>
+        <p:spPr>
+          <a:xfrm>
+            <a:off x="6629400" y="1371600"/>
+            <a:ext cx="0" cy="3566160"/>
+          </a:xfrm>
+          <a:prstGeom prst="line">
+            <a:avLst/>
+          </a:prstGeom>
+          <a:ln w="7620">
+            <a:solidFill>
+              <a:srgbClr val="2E4756"/>
+            </a:solidFill>
+          </a:ln>
+          <a:effectLst/>
+        </p:spPr>
+      </p:cxnSp>
+      <p:sp>
+        <p:nvSpPr>
+          <p:cNvPr id="16" name="C1-E07 text 14" descr="sci-ppt:o014"/>
+          <p:cNvSpPr txBox="1"/>
+          <p:nvPr/>
+        </p:nvSpPr>
+        <p:spPr>
+          <a:xfrm>
+            <a:off x="6172200" y="5020056"/>
+            <a:ext cx="914400" cy="208407"/>
+          </a:xfrm>
+          <a:prstGeom prst="rect">
+            <a:avLst/>
+          </a:prstGeom>
+          <a:noFill/>
+          <a:effectLst/>
+        </p:spPr>
+        <p:txBody>
+          <a:bodyPr wrap="none" lIns="18288" rIns="18288" tIns="18288" bIns="18288" anchor="t">
+            <a:spAutoFit/>
+          </a:bodyPr>
+          <a:lstStyle/>
+          <a:p>
+            <a:pPr algn="ctr">
+              <a:spcAft>
+                <a:spcPts val="0"/>
+              </a:spcAft>
+            </a:pPr>
+            <a:r>
+              <a:rPr sz="1050" b="0" i="0">
+                <a:solidFill>
+                  <a:srgbClr val="B4C7D2"/>
+                </a:solidFill>
+                <a:latin typeface="Arial"/>
+              </a:rPr>
+              <a:t>1.5</a:t>
+            </a:r>
+          </a:p>
+        </p:txBody>
+      </p:sp>
+      <p:cxnSp>
+        <p:nvCxnSpPr>
+          <p:cNvPr id="17" name="C1-E07 line 15" descr="sci-ppt:o015"/>
+          <p:cNvCxnSpPr/>
+          <p:nvPr/>
+        </p:nvCxnSpPr>
+        <p:spPr>
+          <a:xfrm>
+            <a:off x="804671" y="4937760"/>
+            <a:ext cx="64009" cy="0"/>
+          </a:xfrm>
+          <a:prstGeom prst="line">
+            <a:avLst/>
+          </a:prstGeom>
+          <a:ln w="12700">
+            <a:solidFill>
+              <a:srgbClr val="B4C7D2"/>
+            </a:solidFill>
+          </a:ln>
+          <a:effectLst/>
+        </p:spPr>
+      </p:cxnSp>
+      <p:cxnSp>
+        <p:nvCxnSpPr>
+          <p:cNvPr id="18" name="C1-E07 line 16" descr="sci-ppt:o016"/>
+          <p:cNvCxnSpPr/>
+          <p:nvPr/>
+        </p:nvCxnSpPr>
+        <p:spPr>
+          <a:xfrm>
+            <a:off x="804671" y="3823335"/>
+            <a:ext cx="64009" cy="0"/>
+          </a:xfrm>
+          <a:prstGeom prst="line">
+            <a:avLst/>
+          </a:prstGeom>
+          <a:ln w="12700">
+            <a:solidFill>
+              <a:srgbClr val="B4C7D2"/>
+            </a:solidFill>
+          </a:ln>
+          <a:effectLst/>
+        </p:spPr>
+      </p:cxnSp>
+      <p:cxnSp>
+        <p:nvCxnSpPr>
+          <p:cNvPr id="19" name="C1-E07 line 17" descr="sci-ppt:o017"/>
+          <p:cNvCxnSpPr/>
+          <p:nvPr/>
+        </p:nvCxnSpPr>
+        <p:spPr>
+          <a:xfrm>
+            <a:off x="868680" y="3823335"/>
+            <a:ext cx="5760720" cy="0"/>
+          </a:xfrm>
+          <a:prstGeom prst="line">
+            <a:avLst/>
+          </a:prstGeom>
+          <a:ln w="7620">
+            <a:solidFill>
+              <a:srgbClr val="2E4756"/>
+            </a:solidFill>
+          </a:ln>
+          <a:effectLst/>
+        </p:spPr>
+      </p:cxnSp>
+      <p:sp>
+        <p:nvSpPr>
+          <p:cNvPr id="20" name="C1-E07 text 18" descr="sci-ppt:o018"/>
+          <p:cNvSpPr txBox="1"/>
+          <p:nvPr/>
+        </p:nvSpPr>
+        <p:spPr>
+          <a:xfrm>
+            <a:off x="0" y="3741039"/>
+            <a:ext cx="777240" cy="208407"/>
+          </a:xfrm>
+          <a:prstGeom prst="rect">
+            <a:avLst/>
+          </a:prstGeom>
+          <a:noFill/>
+          <a:effectLst/>
+        </p:spPr>
+        <p:txBody>
+          <a:bodyPr wrap="none" lIns="18288" rIns="18288" tIns="18288" bIns="18288" anchor="t">
+            <a:spAutoFit/>
+          </a:bodyPr>
+          <a:lstStyle/>
+          <a:p>
+            <a:pPr algn="r">
+              <a:spcAft>
+                <a:spcPts val="0"/>
+              </a:spcAft>
+            </a:pPr>
+            <a:r>
+              <a:rPr sz="1050" b="0" i="0">
+                <a:solidFill>
+                  <a:srgbClr val="B4C7D2"/>
+                </a:solidFill>
+                <a:latin typeface="Arial"/>
+              </a:rPr>
+              <a:t>1</a:t>
+            </a:r>
+          </a:p>
+        </p:txBody>
+      </p:sp>
+      <p:cxnSp>
+        <p:nvCxnSpPr>
+          <p:cNvPr id="21" name="C1-E07 line 19" descr="sci-ppt:o019"/>
+          <p:cNvCxnSpPr/>
+          <p:nvPr/>
+        </p:nvCxnSpPr>
+        <p:spPr>
+          <a:xfrm>
+            <a:off x="804671" y="2708910"/>
+            <a:ext cx="64009" cy="0"/>
+          </a:xfrm>
+          <a:prstGeom prst="line">
+            <a:avLst/>
+          </a:prstGeom>
+          <a:ln w="12700">
+            <a:solidFill>
+              <a:srgbClr val="B4C7D2"/>
+            </a:solidFill>
+          </a:ln>
+          <a:effectLst/>
+        </p:spPr>
+      </p:cxnSp>
+      <p:cxnSp>
+        <p:nvCxnSpPr>
+          <p:cNvPr id="22" name="C1-E07 line 20" descr="sci-ppt:o020"/>
+          <p:cNvCxnSpPr/>
+          <p:nvPr/>
+        </p:nvCxnSpPr>
+        <p:spPr>
+          <a:xfrm>
+            <a:off x="868680" y="2708910"/>
+            <a:ext cx="5760720" cy="0"/>
+          </a:xfrm>
+          <a:prstGeom prst="line">
+            <a:avLst/>
+          </a:prstGeom>
+          <a:ln w="7620">
+            <a:solidFill>
+              <a:srgbClr val="2E4756"/>
+            </a:solidFill>
+          </a:ln>
+          <a:effectLst/>
+        </p:spPr>
+      </p:cxnSp>
+      <p:sp>
+        <p:nvSpPr>
+          <p:cNvPr id="23" name="C1-E07 text 21" descr="sci-ppt:o021"/>
+          <p:cNvSpPr txBox="1"/>
+          <p:nvPr/>
+        </p:nvSpPr>
+        <p:spPr>
+          <a:xfrm>
+            <a:off x="0" y="2626614"/>
+            <a:ext cx="777240" cy="208407"/>
+          </a:xfrm>
+          <a:prstGeom prst="rect">
+            <a:avLst/>
+          </a:prstGeom>
+          <a:noFill/>
+          <a:effectLst/>
+        </p:spPr>
+        <p:txBody>
+          <a:bodyPr wrap="none" lIns="18288" rIns="18288" tIns="18288" bIns="18288" anchor="t">
+            <a:spAutoFit/>
+          </a:bodyPr>
+          <a:lstStyle/>
+          <a:p>
+            <a:pPr algn="r">
+              <a:spcAft>
+                <a:spcPts val="0"/>
+              </a:spcAft>
+            </a:pPr>
+            <a:r>
+              <a:rPr sz="1050" b="0" i="0">
+                <a:solidFill>
+                  <a:srgbClr val="B4C7D2"/>
+                </a:solidFill>
+                <a:latin typeface="Arial"/>
+              </a:rPr>
+              <a:t>2</a:t>
+            </a:r>
+          </a:p>
+        </p:txBody>
+      </p:sp>
+      <p:cxnSp>
+        <p:nvCxnSpPr>
+          <p:cNvPr id="24" name="C1-E07 line 22" descr="sci-ppt:o022"/>
+          <p:cNvCxnSpPr/>
+          <p:nvPr/>
+        </p:nvCxnSpPr>
+        <p:spPr>
+          <a:xfrm>
+            <a:off x="804671" y="1594485"/>
+            <a:ext cx="64009" cy="0"/>
+          </a:xfrm>
+          <a:prstGeom prst="line">
+            <a:avLst/>
+          </a:prstGeom>
+          <a:ln w="12700">
+            <a:solidFill>
+              <a:srgbClr val="B4C7D2"/>
+            </a:solidFill>
+          </a:ln>
+          <a:effectLst/>
+        </p:spPr>
+      </p:cxnSp>
+      <p:cxnSp>
+        <p:nvCxnSpPr>
+          <p:cNvPr id="25" name="C1-E07 line 23" descr="sci-ppt:o023"/>
+          <p:cNvCxnSpPr/>
+          <p:nvPr/>
+        </p:nvCxnSpPr>
+        <p:spPr>
+          <a:xfrm>
+            <a:off x="868680" y="1594485"/>
+            <a:ext cx="5760720" cy="0"/>
+          </a:xfrm>
+          <a:prstGeom prst="line">
+            <a:avLst/>
+          </a:prstGeom>
+          <a:ln w="7620">
+            <a:solidFill>
+              <a:srgbClr val="2E4756"/>
+            </a:solidFill>
+          </a:ln>
+          <a:effectLst/>
+        </p:spPr>
+      </p:cxnSp>
+      <p:sp>
+        <p:nvSpPr>
+          <p:cNvPr id="26" name="C1-E07 text 24" descr="sci-ppt:o024"/>
+          <p:cNvSpPr txBox="1"/>
+          <p:nvPr/>
+        </p:nvSpPr>
+        <p:spPr>
+          <a:xfrm>
+            <a:off x="0" y="1512189"/>
+            <a:ext cx="777240" cy="208407"/>
+          </a:xfrm>
+          <a:prstGeom prst="rect">
+            <a:avLst/>
+          </a:prstGeom>
+          <a:noFill/>
+          <a:effectLst/>
+        </p:spPr>
+        <p:txBody>
+          <a:bodyPr wrap="none" lIns="18288" rIns="18288" tIns="18288" bIns="18288" anchor="t">
+            <a:spAutoFit/>
+          </a:bodyPr>
+          <a:lstStyle/>
+          <a:p>
+            <a:pPr algn="r">
+              <a:spcAft>
+                <a:spcPts val="0"/>
+              </a:spcAft>
+            </a:pPr>
+            <a:r>
+              <a:rPr sz="1050" b="0" i="0">
+                <a:solidFill>
+                  <a:srgbClr val="B4C7D2"/>
+                </a:solidFill>
+                <a:latin typeface="Arial"/>
+              </a:rPr>
+              <a:t>3</a:t>
+            </a:r>
+          </a:p>
+        </p:txBody>
+      </p:sp>
+      <p:sp>
+        <p:nvSpPr>
+          <p:cNvPr id="27" name="C1-E07 text 25" descr="sci-ppt:o025"/>
+          <p:cNvSpPr txBox="1"/>
+          <p:nvPr/>
+        </p:nvSpPr>
+        <p:spPr>
+          <a:xfrm>
+            <a:off x="868680" y="5221224"/>
+            <a:ext cx="5760720" cy="231648"/>
+          </a:xfrm>
+          <a:prstGeom prst="rect">
+            <a:avLst/>
+          </a:prstGeom>
+          <a:noFill/>
+          <a:effectLst/>
+        </p:spPr>
+        <p:txBody>
+          <a:bodyPr wrap="none" lIns="18288" rIns="18288" tIns="18288" bIns="18288" anchor="t">
+            <a:spAutoFit/>
+          </a:bodyPr>
+          <a:lstStyle/>
+          <a:p>
+            <a:pPr algn="ctr">
+              <a:spcAft>
+                <a:spcPts val="0"/>
+              </a:spcAft>
+            </a:pPr>
+            <a:r>
+              <a:rPr sz="1200" b="0" i="0">
+                <a:solidFill>
+                  <a:srgbClr val="E7F0F3"/>
+                </a:solidFill>
+                <a:latin typeface="Arial"/>
+              </a:rPr>
+              <a:t>t  (µs)</a:t>
+            </a:r>
+          </a:p>
+        </p:txBody>
+      </p:sp>
+      <p:sp>
+        <p:nvSpPr>
+          <p:cNvPr id="28" name="C1-E07 text 26" descr="sci-ppt:o026"/>
+          <p:cNvSpPr txBox="1"/>
+          <p:nvPr/>
+        </p:nvSpPr>
+        <p:spPr>
+          <a:xfrm>
+            <a:off x="320040" y="1024128"/>
+            <a:ext cx="5760720" cy="231648"/>
+          </a:xfrm>
+          <a:prstGeom prst="rect">
+            <a:avLst/>
+          </a:prstGeom>
+          <a:noFill/>
+          <a:effectLst/>
+        </p:spPr>
+        <p:txBody>
+          <a:bodyPr wrap="none" lIns="18288" rIns="18288" tIns="18288" bIns="18288" anchor="t">
+            <a:spAutoFit/>
+          </a:bodyPr>
+          <a:lstStyle/>
+          <a:p>
+            <a:pPr algn="l">
+              <a:spcAft>
+                <a:spcPts val="0"/>
+              </a:spcAft>
+            </a:pPr>
+            <a:r>
+              <a:rPr sz="1200" b="0" i="0">
+                <a:solidFill>
+                  <a:srgbClr val="E7F0F3"/>
+                </a:solidFill>
+                <a:latin typeface="Arial"/>
+              </a:rPr>
+              <a:t>R / R₀</a:t>
+            </a:r>
+          </a:p>
+        </p:txBody>
+      </p:sp>
+      <p:sp>
+        <p:nvSpPr>
+          <p:cNvPr id="29" name="C1-E07 polygon 27" descr="sci-ppt:o027"/>
           <p:cNvSpPr/>
           <p:nvPr/>
         </p:nvSpPr>
         <p:spPr>
           <a:xfrm>
-            <a:off x="2072640" y="1402080"/>
-            <a:ext cx="2438400" cy="2438400"/>
-          </a:xfrm>
-          <a:prstGeom prst="ellipse">
+            <a:off x="868680" y="2209827"/>
+            <a:ext cx="5760720" cy="1613508"/>
+          </a:xfrm>
+          <a:custGeom>
+            <a:avLst/>
+            <a:gdLst/>
+            <a:ahLst/>
+            <a:cxnLst/>
+            <a:rect l="l" t="t" r="r" b="b"/>
+            <a:pathLst>
+              <a:path w="5760720" h="1613508">
+                <a:moveTo>
+                  <a:pt x="0" y="1613508"/>
+                </a:moveTo>
+                <a:lnTo>
+                  <a:pt x="40338" y="1611376"/>
+                </a:lnTo>
+                <a:lnTo>
+                  <a:pt x="80676" y="1605056"/>
+                </a:lnTo>
+                <a:lnTo>
+                  <a:pt x="121015" y="1594758"/>
+                </a:lnTo>
+                <a:lnTo>
+                  <a:pt x="161353" y="1580800"/>
+                </a:lnTo>
+                <a:lnTo>
+                  <a:pt x="201692" y="1563578"/>
+                </a:lnTo>
+                <a:lnTo>
+                  <a:pt x="242030" y="1543528"/>
+                </a:lnTo>
+                <a:lnTo>
+                  <a:pt x="282369" y="1521095"/>
+                </a:lnTo>
+                <a:lnTo>
+                  <a:pt x="322707" y="1496708"/>
+                </a:lnTo>
+                <a:lnTo>
+                  <a:pt x="363046" y="1470767"/>
+                </a:lnTo>
+                <a:lnTo>
+                  <a:pt x="403384" y="1443626"/>
+                </a:lnTo>
+                <a:lnTo>
+                  <a:pt x="443723" y="1415595"/>
+                </a:lnTo>
+                <a:lnTo>
+                  <a:pt x="484061" y="1386940"/>
+                </a:lnTo>
+                <a:lnTo>
+                  <a:pt x="524400" y="1357882"/>
+                </a:lnTo>
+                <a:lnTo>
+                  <a:pt x="564738" y="1328605"/>
+                </a:lnTo>
+                <a:lnTo>
+                  <a:pt x="605077" y="1299261"/>
+                </a:lnTo>
+                <a:lnTo>
+                  <a:pt x="645415" y="1269972"/>
+                </a:lnTo>
+                <a:lnTo>
+                  <a:pt x="685754" y="1240836"/>
+                </a:lnTo>
+                <a:lnTo>
+                  <a:pt x="726092" y="1211932"/>
+                </a:lnTo>
+                <a:lnTo>
+                  <a:pt x="766431" y="1183323"/>
+                </a:lnTo>
+                <a:lnTo>
+                  <a:pt x="806769" y="1155055"/>
+                </a:lnTo>
+                <a:lnTo>
+                  <a:pt x="847108" y="1127167"/>
+                </a:lnTo>
+                <a:lnTo>
+                  <a:pt x="887446" y="1099687"/>
+                </a:lnTo>
+                <a:lnTo>
+                  <a:pt x="927785" y="1072635"/>
+                </a:lnTo>
+                <a:lnTo>
+                  <a:pt x="968123" y="1046028"/>
+                </a:lnTo>
+                <a:lnTo>
+                  <a:pt x="1008462" y="1019874"/>
+                </a:lnTo>
+                <a:lnTo>
+                  <a:pt x="1048800" y="994180"/>
+                </a:lnTo>
+                <a:lnTo>
+                  <a:pt x="1089139" y="968949"/>
+                </a:lnTo>
+                <a:lnTo>
+                  <a:pt x="1129477" y="944182"/>
+                </a:lnTo>
+                <a:lnTo>
+                  <a:pt x="1169816" y="919878"/>
+                </a:lnTo>
+                <a:lnTo>
+                  <a:pt x="1210154" y="896034"/>
+                </a:lnTo>
+                <a:lnTo>
+                  <a:pt x="1250493" y="872645"/>
+                </a:lnTo>
+                <a:lnTo>
+                  <a:pt x="1290831" y="849708"/>
+                </a:lnTo>
+                <a:lnTo>
+                  <a:pt x="1331170" y="827216"/>
+                </a:lnTo>
+                <a:lnTo>
+                  <a:pt x="1371508" y="805162"/>
+                </a:lnTo>
+                <a:lnTo>
+                  <a:pt x="1411847" y="783541"/>
+                </a:lnTo>
+                <a:lnTo>
+                  <a:pt x="1452185" y="762345"/>
+                </a:lnTo>
+                <a:lnTo>
+                  <a:pt x="1492523" y="741567"/>
+                </a:lnTo>
+                <a:lnTo>
+                  <a:pt x="1532862" y="721201"/>
+                </a:lnTo>
+                <a:lnTo>
+                  <a:pt x="1573200" y="701238"/>
+                </a:lnTo>
+                <a:lnTo>
+                  <a:pt x="1613539" y="681672"/>
+                </a:lnTo>
+                <a:lnTo>
+                  <a:pt x="1653877" y="662495"/>
+                </a:lnTo>
+                <a:lnTo>
+                  <a:pt x="1694216" y="643701"/>
+                </a:lnTo>
+                <a:lnTo>
+                  <a:pt x="1734554" y="625282"/>
+                </a:lnTo>
+                <a:lnTo>
+                  <a:pt x="1774893" y="607232"/>
+                </a:lnTo>
+                <a:lnTo>
+                  <a:pt x="1815231" y="589543"/>
+                </a:lnTo>
+                <a:lnTo>
+                  <a:pt x="1855570" y="572210"/>
+                </a:lnTo>
+                <a:lnTo>
+                  <a:pt x="1895908" y="555225"/>
+                </a:lnTo>
+                <a:lnTo>
+                  <a:pt x="1936247" y="538583"/>
+                </a:lnTo>
+                <a:lnTo>
+                  <a:pt x="1976585" y="522278"/>
+                </a:lnTo>
+                <a:lnTo>
+                  <a:pt x="2016924" y="506304"/>
+                </a:lnTo>
+                <a:lnTo>
+                  <a:pt x="2057262" y="490654"/>
+                </a:lnTo>
+                <a:lnTo>
+                  <a:pt x="2097601" y="475324"/>
+                </a:lnTo>
+                <a:lnTo>
+                  <a:pt x="2137939" y="460309"/>
+                </a:lnTo>
+                <a:lnTo>
+                  <a:pt x="2178278" y="445602"/>
+                </a:lnTo>
+                <a:lnTo>
+                  <a:pt x="2218616" y="431199"/>
+                </a:lnTo>
+                <a:lnTo>
+                  <a:pt x="2258955" y="417095"/>
+                </a:lnTo>
+                <a:lnTo>
+                  <a:pt x="2299293" y="403285"/>
+                </a:lnTo>
+                <a:lnTo>
+                  <a:pt x="2339632" y="389765"/>
+                </a:lnTo>
+                <a:lnTo>
+                  <a:pt x="2379970" y="376530"/>
+                </a:lnTo>
+                <a:lnTo>
+                  <a:pt x="2420309" y="363576"/>
+                </a:lnTo>
+                <a:lnTo>
+                  <a:pt x="2460647" y="350900"/>
+                </a:lnTo>
+                <a:lnTo>
+                  <a:pt x="2500986" y="338496"/>
+                </a:lnTo>
+                <a:lnTo>
+                  <a:pt x="2541324" y="326361"/>
+                </a:lnTo>
+                <a:lnTo>
+                  <a:pt x="2581663" y="314491"/>
+                </a:lnTo>
+                <a:lnTo>
+                  <a:pt x="2622001" y="302883"/>
+                </a:lnTo>
+                <a:lnTo>
+                  <a:pt x="2662340" y="291533"/>
+                </a:lnTo>
+                <a:lnTo>
+                  <a:pt x="2702678" y="280438"/>
+                </a:lnTo>
+                <a:lnTo>
+                  <a:pt x="2743017" y="269595"/>
+                </a:lnTo>
+                <a:lnTo>
+                  <a:pt x="2783355" y="259000"/>
+                </a:lnTo>
+                <a:lnTo>
+                  <a:pt x="2823694" y="248651"/>
+                </a:lnTo>
+                <a:lnTo>
+                  <a:pt x="2864032" y="238544"/>
+                </a:lnTo>
+                <a:lnTo>
+                  <a:pt x="2904371" y="228676"/>
+                </a:lnTo>
+                <a:lnTo>
+                  <a:pt x="2944709" y="219046"/>
+                </a:lnTo>
+                <a:lnTo>
+                  <a:pt x="2985047" y="209650"/>
+                </a:lnTo>
+                <a:lnTo>
+                  <a:pt x="3025386" y="200485"/>
+                </a:lnTo>
+                <a:lnTo>
+                  <a:pt x="3065724" y="191550"/>
+                </a:lnTo>
+                <a:lnTo>
+                  <a:pt x="3106063" y="182841"/>
+                </a:lnTo>
+                <a:lnTo>
+                  <a:pt x="3146401" y="174357"/>
+                </a:lnTo>
+                <a:lnTo>
+                  <a:pt x="3186740" y="166096"/>
+                </a:lnTo>
+                <a:lnTo>
+                  <a:pt x="3227078" y="158055"/>
+                </a:lnTo>
+                <a:lnTo>
+                  <a:pt x="3267417" y="150231"/>
+                </a:lnTo>
+                <a:lnTo>
+                  <a:pt x="3307755" y="142625"/>
+                </a:lnTo>
+                <a:lnTo>
+                  <a:pt x="3348094" y="135232"/>
+                </a:lnTo>
+                <a:lnTo>
+                  <a:pt x="3388432" y="128051"/>
+                </a:lnTo>
+                <a:lnTo>
+                  <a:pt x="3428771" y="121082"/>
+                </a:lnTo>
+                <a:lnTo>
+                  <a:pt x="3469109" y="114321"/>
+                </a:lnTo>
+                <a:lnTo>
+                  <a:pt x="3509448" y="107767"/>
+                </a:lnTo>
+                <a:lnTo>
+                  <a:pt x="3549786" y="101419"/>
+                </a:lnTo>
+                <a:lnTo>
+                  <a:pt x="3590125" y="95275"/>
+                </a:lnTo>
+                <a:lnTo>
+                  <a:pt x="3630463" y="89334"/>
+                </a:lnTo>
+                <a:lnTo>
+                  <a:pt x="3670802" y="83594"/>
+                </a:lnTo>
+                <a:lnTo>
+                  <a:pt x="3711140" y="78054"/>
+                </a:lnTo>
+                <a:lnTo>
+                  <a:pt x="3751479" y="72713"/>
+                </a:lnTo>
+                <a:lnTo>
+                  <a:pt x="3791817" y="67569"/>
+                </a:lnTo>
+                <a:lnTo>
+                  <a:pt x="3832156" y="62621"/>
+                </a:lnTo>
+                <a:lnTo>
+                  <a:pt x="3872494" y="57868"/>
+                </a:lnTo>
+                <a:lnTo>
+                  <a:pt x="3912833" y="53309"/>
+                </a:lnTo>
+                <a:lnTo>
+                  <a:pt x="3953171" y="48943"/>
+                </a:lnTo>
+                <a:lnTo>
+                  <a:pt x="3993510" y="44768"/>
+                </a:lnTo>
+                <a:lnTo>
+                  <a:pt x="4033848" y="40785"/>
+                </a:lnTo>
+                <a:lnTo>
+                  <a:pt x="4074187" y="36991"/>
+                </a:lnTo>
+                <a:lnTo>
+                  <a:pt x="4114525" y="33387"/>
+                </a:lnTo>
+                <a:lnTo>
+                  <a:pt x="4154864" y="29971"/>
+                </a:lnTo>
+                <a:lnTo>
+                  <a:pt x="4195202" y="26742"/>
+                </a:lnTo>
+                <a:lnTo>
+                  <a:pt x="4235541" y="23700"/>
+                </a:lnTo>
+                <a:lnTo>
+                  <a:pt x="4275879" y="20845"/>
+                </a:lnTo>
+                <a:lnTo>
+                  <a:pt x="4316218" y="18175"/>
+                </a:lnTo>
+                <a:lnTo>
+                  <a:pt x="4356556" y="15690"/>
+                </a:lnTo>
+                <a:lnTo>
+                  <a:pt x="4396894" y="13389"/>
+                </a:lnTo>
+                <a:lnTo>
+                  <a:pt x="4437233" y="11271"/>
+                </a:lnTo>
+                <a:lnTo>
+                  <a:pt x="4477571" y="9337"/>
+                </a:lnTo>
+                <a:lnTo>
+                  <a:pt x="4517910" y="7586"/>
+                </a:lnTo>
+                <a:lnTo>
+                  <a:pt x="4558248" y="6018"/>
+                </a:lnTo>
+                <a:lnTo>
+                  <a:pt x="4598587" y="4631"/>
+                </a:lnTo>
+                <a:lnTo>
+                  <a:pt x="4638925" y="3426"/>
+                </a:lnTo>
+                <a:lnTo>
+                  <a:pt x="4679264" y="2403"/>
+                </a:lnTo>
+                <a:lnTo>
+                  <a:pt x="4719602" y="1561"/>
+                </a:lnTo>
+                <a:lnTo>
+                  <a:pt x="4759941" y="899"/>
+                </a:lnTo>
+                <a:lnTo>
+                  <a:pt x="4800279" y="419"/>
+                </a:lnTo>
+                <a:lnTo>
+                  <a:pt x="4840618" y="119"/>
+                </a:lnTo>
+                <a:lnTo>
+                  <a:pt x="4880956" y="0"/>
+                </a:lnTo>
+                <a:lnTo>
+                  <a:pt x="4921295" y="61"/>
+                </a:lnTo>
+                <a:lnTo>
+                  <a:pt x="4961633" y="302"/>
+                </a:lnTo>
+                <a:lnTo>
+                  <a:pt x="5001972" y="724"/>
+                </a:lnTo>
+                <a:lnTo>
+                  <a:pt x="5042310" y="1326"/>
+                </a:lnTo>
+                <a:lnTo>
+                  <a:pt x="5082649" y="2109"/>
+                </a:lnTo>
+                <a:lnTo>
+                  <a:pt x="5122987" y="3072"/>
+                </a:lnTo>
+                <a:lnTo>
+                  <a:pt x="5163326" y="4216"/>
+                </a:lnTo>
+                <a:lnTo>
+                  <a:pt x="5203664" y="5541"/>
+                </a:lnTo>
+                <a:lnTo>
+                  <a:pt x="5244003" y="7048"/>
+                </a:lnTo>
+                <a:lnTo>
+                  <a:pt x="5284341" y="8735"/>
+                </a:lnTo>
+                <a:lnTo>
+                  <a:pt x="5324680" y="10604"/>
+                </a:lnTo>
+                <a:lnTo>
+                  <a:pt x="5365018" y="12656"/>
+                </a:lnTo>
+                <a:lnTo>
+                  <a:pt x="5405357" y="14889"/>
+                </a:lnTo>
+                <a:lnTo>
+                  <a:pt x="5445695" y="17306"/>
+                </a:lnTo>
+                <a:lnTo>
+                  <a:pt x="5486034" y="19905"/>
+                </a:lnTo>
+                <a:lnTo>
+                  <a:pt x="5526372" y="22689"/>
+                </a:lnTo>
+                <a:lnTo>
+                  <a:pt x="5566711" y="25656"/>
+                </a:lnTo>
+                <a:lnTo>
+                  <a:pt x="5607049" y="28809"/>
+                </a:lnTo>
+                <a:lnTo>
+                  <a:pt x="5647388" y="32146"/>
+                </a:lnTo>
+                <a:lnTo>
+                  <a:pt x="5687726" y="35670"/>
+                </a:lnTo>
+                <a:lnTo>
+                  <a:pt x="5728065" y="39381"/>
+                </a:lnTo>
+                <a:lnTo>
+                  <a:pt x="5760720" y="42521"/>
+                </a:lnTo>
+              </a:path>
+            </a:pathLst>
+          </a:custGeom>
+          <a:noFill/>
+          <a:ln w="38100">
+            <a:solidFill>
+              <a:srgbClr val="8EDBD4"/>
+            </a:solidFill>
+          </a:ln>
+          <a:effectLst/>
+        </p:spPr>
+        <p:txBody>
+          <a:bodyPr rtlCol="0" anchor="ctr"/>
+          <a:lstStyle/>
+          <a:p>
+            <a:pPr algn="ctr"/>
+          </a:p>
+        </p:txBody>
+      </p:sp>
+      <p:sp>
+        <p:nvSpPr>
+          <p:cNvPr id="30" name="C1-E07 polygon 28" descr="sci-ppt:o028"/>
+          <p:cNvSpPr/>
+          <p:nvPr/>
+        </p:nvSpPr>
+        <p:spPr>
+          <a:xfrm>
+            <a:off x="868680" y="2023136"/>
+            <a:ext cx="5760720" cy="1800199"/>
+          </a:xfrm>
+          <a:custGeom>
+            <a:avLst/>
+            <a:gdLst/>
+            <a:ahLst/>
+            <a:cxnLst/>
+            <a:rect l="l" t="t" r="r" b="b"/>
+            <a:pathLst>
+              <a:path w="5760720" h="1800199">
+                <a:moveTo>
+                  <a:pt x="0" y="1800199"/>
+                </a:moveTo>
+                <a:lnTo>
+                  <a:pt x="40338" y="1797995"/>
+                </a:lnTo>
+                <a:lnTo>
+                  <a:pt x="80676" y="1791459"/>
+                </a:lnTo>
+                <a:lnTo>
+                  <a:pt x="121015" y="1780805"/>
+                </a:lnTo>
+                <a:lnTo>
+                  <a:pt x="161353" y="1766361"/>
+                </a:lnTo>
+                <a:lnTo>
+                  <a:pt x="201692" y="1748539"/>
+                </a:lnTo>
+                <a:lnTo>
+                  <a:pt x="242030" y="1727790"/>
+                </a:lnTo>
+                <a:lnTo>
+                  <a:pt x="282369" y="1704578"/>
+                </a:lnTo>
+                <a:lnTo>
+                  <a:pt x="322707" y="1679347"/>
+                </a:lnTo>
+                <a:lnTo>
+                  <a:pt x="363046" y="1652511"/>
+                </a:lnTo>
+                <a:lnTo>
+                  <a:pt x="403384" y="1624435"/>
+                </a:lnTo>
+                <a:lnTo>
+                  <a:pt x="443723" y="1595440"/>
+                </a:lnTo>
+                <a:lnTo>
+                  <a:pt x="484061" y="1565796"/>
+                </a:lnTo>
+                <a:lnTo>
+                  <a:pt x="524400" y="1535731"/>
+                </a:lnTo>
+                <a:lnTo>
+                  <a:pt x="564738" y="1505434"/>
+                </a:lnTo>
+                <a:lnTo>
+                  <a:pt x="605077" y="1475058"/>
+                </a:lnTo>
+                <a:lnTo>
+                  <a:pt x="645415" y="1444728"/>
+                </a:lnTo>
+                <a:lnTo>
+                  <a:pt x="685754" y="1414544"/>
+                </a:lnTo>
+                <a:lnTo>
+                  <a:pt x="726092" y="1384585"/>
+                </a:lnTo>
+                <a:lnTo>
+                  <a:pt x="766431" y="1354913"/>
+                </a:lnTo>
+                <a:lnTo>
+                  <a:pt x="806769" y="1325578"/>
+                </a:lnTo>
+                <a:lnTo>
+                  <a:pt x="847108" y="1296616"/>
+                </a:lnTo>
+                <a:lnTo>
+                  <a:pt x="887446" y="1268057"/>
+                </a:lnTo>
+                <a:lnTo>
+                  <a:pt x="927785" y="1239920"/>
+                </a:lnTo>
+                <a:lnTo>
+                  <a:pt x="968123" y="1212222"/>
+                </a:lnTo>
+                <a:lnTo>
+                  <a:pt x="1008462" y="1184971"/>
+                </a:lnTo>
+                <a:lnTo>
+                  <a:pt x="1048800" y="1158175"/>
+                </a:lnTo>
+                <a:lnTo>
+                  <a:pt x="1089139" y="1131835"/>
+                </a:lnTo>
+                <a:lnTo>
+                  <a:pt x="1129477" y="1105953"/>
+                </a:lnTo>
+                <a:lnTo>
+                  <a:pt x="1169816" y="1080528"/>
+                </a:lnTo>
+                <a:lnTo>
+                  <a:pt x="1210154" y="1055556"/>
+                </a:lnTo>
+                <a:lnTo>
+                  <a:pt x="1250493" y="1031032"/>
+                </a:lnTo>
+                <a:lnTo>
+                  <a:pt x="1290831" y="1006953"/>
+                </a:lnTo>
+                <a:lnTo>
+                  <a:pt x="1331170" y="983312"/>
+                </a:lnTo>
+                <a:lnTo>
+                  <a:pt x="1371508" y="960103"/>
+                </a:lnTo>
+                <a:lnTo>
+                  <a:pt x="1411847" y="937319"/>
+                </a:lnTo>
+                <a:lnTo>
+                  <a:pt x="1452185" y="914953"/>
+                </a:lnTo>
+                <a:lnTo>
+                  <a:pt x="1492523" y="892998"/>
+                </a:lnTo>
+                <a:lnTo>
+                  <a:pt x="1532862" y="871446"/>
+                </a:lnTo>
+                <a:lnTo>
+                  <a:pt x="1573200" y="850291"/>
+                </a:lnTo>
+                <a:lnTo>
+                  <a:pt x="1613539" y="829524"/>
+                </a:lnTo>
+                <a:lnTo>
+                  <a:pt x="1653877" y="809139"/>
+                </a:lnTo>
+                <a:lnTo>
+                  <a:pt x="1694216" y="789128"/>
+                </a:lnTo>
+                <a:lnTo>
+                  <a:pt x="1734554" y="769485"/>
+                </a:lnTo>
+                <a:lnTo>
+                  <a:pt x="1774893" y="750203"/>
+                </a:lnTo>
+                <a:lnTo>
+                  <a:pt x="1815231" y="731274"/>
+                </a:lnTo>
+                <a:lnTo>
+                  <a:pt x="1855570" y="712692"/>
+                </a:lnTo>
+                <a:lnTo>
+                  <a:pt x="1895908" y="694451"/>
+                </a:lnTo>
+                <a:lnTo>
+                  <a:pt x="1936247" y="676544"/>
+                </a:lnTo>
+                <a:lnTo>
+                  <a:pt x="1976585" y="658965"/>
+                </a:lnTo>
+                <a:lnTo>
+                  <a:pt x="2016924" y="641708"/>
+                </a:lnTo>
+                <a:lnTo>
+                  <a:pt x="2057262" y="624768"/>
+                </a:lnTo>
+                <a:lnTo>
+                  <a:pt x="2097601" y="608139"/>
+                </a:lnTo>
+                <a:lnTo>
+                  <a:pt x="2137939" y="591814"/>
+                </a:lnTo>
+                <a:lnTo>
+                  <a:pt x="2178278" y="575790"/>
+                </a:lnTo>
+                <a:lnTo>
+                  <a:pt x="2218616" y="560061"/>
+                </a:lnTo>
+                <a:lnTo>
+                  <a:pt x="2258955" y="544622"/>
+                </a:lnTo>
+                <a:lnTo>
+                  <a:pt x="2299293" y="529468"/>
+                </a:lnTo>
+                <a:lnTo>
+                  <a:pt x="2339632" y="514595"/>
+                </a:lnTo>
+                <a:lnTo>
+                  <a:pt x="2379970" y="499998"/>
+                </a:lnTo>
+                <a:lnTo>
+                  <a:pt x="2420309" y="485672"/>
+                </a:lnTo>
+                <a:lnTo>
+                  <a:pt x="2460647" y="471614"/>
+                </a:lnTo>
+                <a:lnTo>
+                  <a:pt x="2500986" y="457819"/>
+                </a:lnTo>
+                <a:lnTo>
+                  <a:pt x="2541324" y="444284"/>
+                </a:lnTo>
+                <a:lnTo>
+                  <a:pt x="2581663" y="431004"/>
+                </a:lnTo>
+                <a:lnTo>
+                  <a:pt x="2622001" y="417976"/>
+                </a:lnTo>
+                <a:lnTo>
+                  <a:pt x="2662340" y="405196"/>
+                </a:lnTo>
+                <a:lnTo>
+                  <a:pt x="2702678" y="392661"/>
+                </a:lnTo>
+                <a:lnTo>
+                  <a:pt x="2743017" y="380368"/>
+                </a:lnTo>
+                <a:lnTo>
+                  <a:pt x="2783355" y="368313"/>
+                </a:lnTo>
+                <a:lnTo>
+                  <a:pt x="2823694" y="356493"/>
+                </a:lnTo>
+                <a:lnTo>
+                  <a:pt x="2864032" y="344905"/>
+                </a:lnTo>
+                <a:lnTo>
+                  <a:pt x="2904371" y="333546"/>
+                </a:lnTo>
+                <a:lnTo>
+                  <a:pt x="2944709" y="322414"/>
+                </a:lnTo>
+                <a:lnTo>
+                  <a:pt x="2985047" y="311505"/>
+                </a:lnTo>
+                <a:lnTo>
+                  <a:pt x="3025386" y="300816"/>
+                </a:lnTo>
+                <a:lnTo>
+                  <a:pt x="3065724" y="290346"/>
+                </a:lnTo>
+                <a:lnTo>
+                  <a:pt x="3106063" y="280092"/>
+                </a:lnTo>
+                <a:lnTo>
+                  <a:pt x="3146401" y="270051"/>
+                </a:lnTo>
+                <a:lnTo>
+                  <a:pt x="3186740" y="260221"/>
+                </a:lnTo>
+                <a:lnTo>
+                  <a:pt x="3227078" y="250600"/>
+                </a:lnTo>
+                <a:lnTo>
+                  <a:pt x="3267417" y="241186"/>
+                </a:lnTo>
+                <a:lnTo>
+                  <a:pt x="3307755" y="231976"/>
+                </a:lnTo>
+                <a:lnTo>
+                  <a:pt x="3348094" y="222968"/>
+                </a:lnTo>
+                <a:lnTo>
+                  <a:pt x="3388432" y="214160"/>
+                </a:lnTo>
+                <a:lnTo>
+                  <a:pt x="3428771" y="205551"/>
+                </a:lnTo>
+                <a:lnTo>
+                  <a:pt x="3469109" y="197139"/>
+                </a:lnTo>
+                <a:lnTo>
+                  <a:pt x="3509448" y="188921"/>
+                </a:lnTo>
+                <a:lnTo>
+                  <a:pt x="3549786" y="180897"/>
+                </a:lnTo>
+                <a:lnTo>
+                  <a:pt x="3590125" y="173064"/>
+                </a:lnTo>
+                <a:lnTo>
+                  <a:pt x="3630463" y="165420"/>
+                </a:lnTo>
+                <a:lnTo>
+                  <a:pt x="3670802" y="157965"/>
+                </a:lnTo>
+                <a:lnTo>
+                  <a:pt x="3711140" y="150696"/>
+                </a:lnTo>
+                <a:lnTo>
+                  <a:pt x="3751479" y="143613"/>
+                </a:lnTo>
+                <a:lnTo>
+                  <a:pt x="3791817" y="136713"/>
+                </a:lnTo>
+                <a:lnTo>
+                  <a:pt x="3832156" y="129996"/>
+                </a:lnTo>
+                <a:lnTo>
+                  <a:pt x="3872494" y="123459"/>
+                </a:lnTo>
+                <a:lnTo>
+                  <a:pt x="3912833" y="117103"/>
+                </a:lnTo>
+                <a:lnTo>
+                  <a:pt x="3953171" y="110925"/>
+                </a:lnTo>
+                <a:lnTo>
+                  <a:pt x="3993510" y="104924"/>
+                </a:lnTo>
+                <a:lnTo>
+                  <a:pt x="4033848" y="99099"/>
+                </a:lnTo>
+                <a:lnTo>
+                  <a:pt x="4074187" y="93450"/>
+                </a:lnTo>
+                <a:lnTo>
+                  <a:pt x="4114525" y="87974"/>
+                </a:lnTo>
+                <a:lnTo>
+                  <a:pt x="4154864" y="82672"/>
+                </a:lnTo>
+                <a:lnTo>
+                  <a:pt x="4195202" y="77542"/>
+                </a:lnTo>
+                <a:lnTo>
+                  <a:pt x="4235541" y="72582"/>
+                </a:lnTo>
+                <a:lnTo>
+                  <a:pt x="4275879" y="67793"/>
+                </a:lnTo>
+                <a:lnTo>
+                  <a:pt x="4316218" y="63173"/>
+                </a:lnTo>
+                <a:lnTo>
+                  <a:pt x="4356556" y="58721"/>
+                </a:lnTo>
+                <a:lnTo>
+                  <a:pt x="4396894" y="54437"/>
+                </a:lnTo>
+                <a:lnTo>
+                  <a:pt x="4437233" y="50320"/>
+                </a:lnTo>
+                <a:lnTo>
+                  <a:pt x="4477571" y="46369"/>
+                </a:lnTo>
+                <a:lnTo>
+                  <a:pt x="4517910" y="42583"/>
+                </a:lnTo>
+                <a:lnTo>
+                  <a:pt x="4558248" y="38962"/>
+                </a:lnTo>
+                <a:lnTo>
+                  <a:pt x="4598587" y="35506"/>
+                </a:lnTo>
+                <a:lnTo>
+                  <a:pt x="4638925" y="32212"/>
+                </a:lnTo>
+                <a:lnTo>
+                  <a:pt x="4679264" y="29082"/>
+                </a:lnTo>
+                <a:lnTo>
+                  <a:pt x="4719602" y="26114"/>
+                </a:lnTo>
+                <a:lnTo>
+                  <a:pt x="4759941" y="23307"/>
+                </a:lnTo>
+                <a:lnTo>
+                  <a:pt x="4800279" y="20662"/>
+                </a:lnTo>
+                <a:lnTo>
+                  <a:pt x="4840618" y="18178"/>
+                </a:lnTo>
+                <a:lnTo>
+                  <a:pt x="4880956" y="15855"/>
+                </a:lnTo>
+                <a:lnTo>
+                  <a:pt x="4921295" y="13691"/>
+                </a:lnTo>
+                <a:lnTo>
+                  <a:pt x="4961633" y="11687"/>
+                </a:lnTo>
+                <a:lnTo>
+                  <a:pt x="5001972" y="9843"/>
+                </a:lnTo>
+                <a:lnTo>
+                  <a:pt x="5042310" y="8157"/>
+                </a:lnTo>
+                <a:lnTo>
+                  <a:pt x="5082649" y="6631"/>
+                </a:lnTo>
+                <a:lnTo>
+                  <a:pt x="5122987" y="5262"/>
+                </a:lnTo>
+                <a:lnTo>
+                  <a:pt x="5163326" y="4052"/>
+                </a:lnTo>
+                <a:lnTo>
+                  <a:pt x="5203664" y="3001"/>
+                </a:lnTo>
+                <a:lnTo>
+                  <a:pt x="5244003" y="2107"/>
+                </a:lnTo>
+                <a:lnTo>
+                  <a:pt x="5284341" y="1370"/>
+                </a:lnTo>
+                <a:lnTo>
+                  <a:pt x="5324680" y="792"/>
+                </a:lnTo>
+                <a:lnTo>
+                  <a:pt x="5365018" y="370"/>
+                </a:lnTo>
+                <a:lnTo>
+                  <a:pt x="5405357" y="107"/>
+                </a:lnTo>
+                <a:lnTo>
+                  <a:pt x="5445695" y="0"/>
+                </a:lnTo>
+                <a:lnTo>
+                  <a:pt x="5486034" y="51"/>
+                </a:lnTo>
+                <a:lnTo>
+                  <a:pt x="5526372" y="260"/>
+                </a:lnTo>
+                <a:lnTo>
+                  <a:pt x="5566711" y="626"/>
+                </a:lnTo>
+                <a:lnTo>
+                  <a:pt x="5607049" y="1149"/>
+                </a:lnTo>
+                <a:lnTo>
+                  <a:pt x="5647388" y="1830"/>
+                </a:lnTo>
+                <a:lnTo>
+                  <a:pt x="5687726" y="2668"/>
+                </a:lnTo>
+                <a:lnTo>
+                  <a:pt x="5728065" y="3665"/>
+                </a:lnTo>
+                <a:lnTo>
+                  <a:pt x="5760720" y="4587"/>
+                </a:lnTo>
+              </a:path>
+            </a:pathLst>
+          </a:custGeom>
+          <a:noFill/>
+          <a:ln w="24130">
+            <a:solidFill>
+              <a:srgbClr val="B4C7D2"/>
+            </a:solidFill>
+            <a:prstDash val="dash"/>
+          </a:ln>
+          <a:effectLst/>
+        </p:spPr>
+        <p:txBody>
+          <a:bodyPr rtlCol="0" anchor="ctr"/>
+          <a:lstStyle/>
+          <a:p>
+            <a:pPr algn="ctr"/>
+          </a:p>
+        </p:txBody>
+      </p:sp>
+      <p:sp>
+        <p:nvSpPr>
+          <p:cNvPr id="31" name="C1-E07 text 29" descr="sci-ppt:o029"/>
+          <p:cNvSpPr txBox="1"/>
+          <p:nvPr/>
+        </p:nvSpPr>
+        <p:spPr>
+          <a:xfrm>
+            <a:off x="1133856" y="1348168"/>
+            <a:ext cx="3657600" cy="239395"/>
+          </a:xfrm>
+          <a:prstGeom prst="rect">
+            <a:avLst/>
+          </a:prstGeom>
+          <a:noFill/>
+          <a:effectLst/>
+        </p:spPr>
+        <p:txBody>
+          <a:bodyPr wrap="none" lIns="18288" rIns="18288" tIns="18288" bIns="18288" anchor="t">
+            <a:spAutoFit/>
+          </a:bodyPr>
+          <a:lstStyle/>
+          <a:p>
+            <a:pPr algn="l">
+              <a:spcAft>
+                <a:spcPts val="0"/>
+              </a:spcAft>
+            </a:pPr>
+            <a:r>
+              <a:rPr sz="1250" b="0" i="0">
+                <a:solidFill>
+                  <a:srgbClr val="8EDBD4"/>
+                </a:solidFill>
+                <a:latin typeface="Arial"/>
+              </a:rPr>
+              <a:t>with surface tension and viscosity</a:t>
+            </a:r>
+          </a:p>
+        </p:txBody>
+      </p:sp>
+      <p:sp>
+        <p:nvSpPr>
+          <p:cNvPr id="32" name="C1-E07 text 30" descr="sci-ppt:o030"/>
+          <p:cNvSpPr txBox="1"/>
+          <p:nvPr/>
+        </p:nvSpPr>
+        <p:spPr>
+          <a:xfrm>
+            <a:off x="1133856" y="1715928"/>
+            <a:ext cx="3657600" cy="239395"/>
+          </a:xfrm>
+          <a:prstGeom prst="rect">
+            <a:avLst/>
+          </a:prstGeom>
+          <a:noFill/>
+          <a:effectLst/>
+        </p:spPr>
+        <p:txBody>
+          <a:bodyPr wrap="none" lIns="18288" rIns="18288" tIns="18288" bIns="18288" anchor="t">
+            <a:spAutoFit/>
+          </a:bodyPr>
+          <a:lstStyle/>
+          <a:p>
+            <a:pPr algn="l">
+              <a:spcAft>
+                <a:spcPts val="0"/>
+              </a:spcAft>
+            </a:pPr>
+            <a:r>
+              <a:rPr sz="1250" b="0" i="0">
+                <a:solidFill>
+                  <a:srgbClr val="B4C7D2"/>
+                </a:solidFill>
+                <a:latin typeface="Arial"/>
+              </a:rPr>
+              <a:t>ideal: σ = μ = 0, same start</a:t>
+            </a:r>
+          </a:p>
+        </p:txBody>
+      </p:sp>
+      <p:sp>
+        <p:nvSpPr>
+          <p:cNvPr id="33" name="C1-E07 round_rect 31" descr="sci-ppt:o031"/>
+          <p:cNvSpPr/>
+          <p:nvPr/>
+        </p:nvSpPr>
+        <p:spPr>
+          <a:xfrm>
+            <a:off x="6949440" y="1325880"/>
+            <a:ext cx="4892040" cy="3749039"/>
+          </a:xfrm>
+          <a:prstGeom prst="roundRect">
             <a:avLst/>
           </a:prstGeom>
           <a:solidFill>
             <a:srgbClr val="213E4B"/>
           </a:solidFill>
-          <a:ln w="21590">
+          <a:ln w="20320">
+            <a:solidFill>
+              <a:srgbClr val="8EDBD4"/>
+            </a:solidFill>
+          </a:ln>
+          <a:effectLst/>
+        </p:spPr>
+        <p:txBody>
+          <a:bodyPr rtlCol="0" anchor="ctr"/>
+          <a:lstStyle/>
+          <a:p>
+            <a:pPr algn="ctr"/>
+          </a:p>
+        </p:txBody>
+      </p:sp>
+      <p:sp>
+        <p:nvSpPr>
+          <p:cNvPr id="34" name="C1-E07 text 32" descr="sci-ppt:o032"/>
+          <p:cNvSpPr txBox="1"/>
+          <p:nvPr/>
+        </p:nvSpPr>
+        <p:spPr>
+          <a:xfrm>
+            <a:off x="7059168" y="1380744"/>
+            <a:ext cx="4672583" cy="254889"/>
+          </a:xfrm>
+          <a:prstGeom prst="rect">
+            <a:avLst/>
+          </a:prstGeom>
+          <a:noFill/>
+          <a:effectLst/>
+        </p:spPr>
+        <p:txBody>
+          <a:bodyPr wrap="none" lIns="18288" rIns="18288" tIns="18288" bIns="18288" anchor="t">
+            <a:spAutoFit/>
+          </a:bodyPr>
+          <a:lstStyle/>
+          <a:p>
+            <a:pPr algn="l">
+              <a:spcAft>
+                <a:spcPts val="0"/>
+              </a:spcAft>
+            </a:pPr>
+            <a:r>
+              <a:rPr sz="1350" b="1" i="0">
+                <a:solidFill>
+                  <a:srgbClr val="8EDBD4"/>
+                </a:solidFill>
+                <a:latin typeface="Arial"/>
+              </a:rPr>
+              <a:t>Every term is a pressure</a:t>
+            </a:r>
+          </a:p>
+        </p:txBody>
+      </p:sp>
+      <p:cxnSp>
+        <p:nvCxnSpPr>
+          <p:cNvPr id="35" name="C1-E07 line 33" descr="sci-ppt:o033"/>
+          <p:cNvCxnSpPr/>
+          <p:nvPr/>
+        </p:nvCxnSpPr>
+        <p:spPr>
+          <a:xfrm>
+            <a:off x="9509760" y="1828800"/>
+            <a:ext cx="0" cy="2240280"/>
+          </a:xfrm>
+          <a:prstGeom prst="line">
+            <a:avLst/>
+          </a:prstGeom>
+          <a:ln w="15240">
             <a:solidFill>
               <a:srgbClr val="B4C7D2"/>
             </a:solidFill>
           </a:ln>
           <a:effectLst/>
         </p:spPr>
-        <p:txBody>
-          <a:bodyPr rtlCol="0" anchor="ctr"/>
-          <a:lstStyle/>
-          <a:p>
-            <a:pPr algn="ctr"/>
-          </a:p>
-        </p:txBody>
-      </p:sp>
-      <p:cxnSp>
-        <p:nvCxnSpPr>
-          <p:cNvPr id="4" name="arrow3" descr="sci-ppt:C1-E07-003"/>
-          <p:cNvCxnSpPr/>
-          <p:nvPr/>
-        </p:nvCxnSpPr>
-        <p:spPr>
-          <a:xfrm>
-            <a:off x="3291840" y="2621280"/>
-            <a:ext cx="1219200" cy="0"/>
-          </a:xfrm>
-          <a:prstGeom prst="line">
-            <a:avLst/>
-          </a:prstGeom>
-          <a:ln w="25400">
-            <a:solidFill>
-              <a:srgbClr val="8EDBD4"/>
-            </a:solidFill>
-            <a:headEnd type="none" w="med" len="med"/>
-            <a:tailEnd type="triangle" w="med" len="med"/>
-          </a:ln>
-          <a:effectLst/>
-        </p:spPr>
       </p:cxnSp>
       <p:sp>
         <p:nvSpPr>
-          <p:cNvPr id="5" name="text4" descr="sci-ppt:C1-E07-004"/>
+          <p:cNvPr id="36" name="C1-E07 text 34" descr="sci-ppt:o034"/>
           <p:cNvSpPr txBox="1"/>
           <p:nvPr/>
         </p:nvSpPr>
         <p:spPr>
           <a:xfrm>
-            <a:off x="3474720" y="2133600"/>
-            <a:ext cx="1584960" cy="396849"/>
+            <a:off x="7086600" y="1892807"/>
+            <a:ext cx="2103120" cy="231648"/>
           </a:xfrm>
           <a:prstGeom prst="rect">
             <a:avLst/>
@@ -3210,7 +5003,7 @@
           <a:effectLst/>
         </p:spPr>
         <p:txBody>
-          <a:bodyPr wrap="none" lIns="27432" rIns="27432" tIns="18288" bIns="18288" anchor="ctr">
+          <a:bodyPr wrap="none" lIns="18288" rIns="18288" tIns="18288" bIns="18288" anchor="t">
             <a:spAutoFit/>
           </a:bodyPr>
           <a:lstStyle/>
@@ -3221,27 +5014,99 @@
               </a:spcAft>
             </a:pPr>
             <a:r>
-              <a:rPr sz="2016" b="0" i="0">
+              <a:rPr sz="1200" b="1" i="0">
+                <a:solidFill>
+                  <a:srgbClr val="8EDBD4"/>
+                </a:solidFill>
+                <a:latin typeface="Arial"/>
+              </a:rPr>
+              <a:t>ρ(RR̈ + 3Ṙ²/2)</a:t>
+            </a:r>
+          </a:p>
+        </p:txBody>
+      </p:sp>
+      <p:sp>
+        <p:nvSpPr>
+          <p:cNvPr id="37" name="C1-E07 rect 35" descr="sci-ppt:o035"/>
+          <p:cNvSpPr/>
+          <p:nvPr/>
+        </p:nvSpPr>
+        <p:spPr>
+          <a:xfrm>
+            <a:off x="9509760" y="1920239"/>
+            <a:ext cx="1160842" cy="292608"/>
+          </a:xfrm>
+          <a:prstGeom prst="rect">
+            <a:avLst/>
+          </a:prstGeom>
+          <a:solidFill>
+            <a:srgbClr val="8EDBD4"/>
+          </a:solidFill>
+          <a:ln w="12700">
+            <a:solidFill>
+              <a:srgbClr val="8EDBD4"/>
+            </a:solidFill>
+          </a:ln>
+          <a:effectLst/>
+        </p:spPr>
+        <p:txBody>
+          <a:bodyPr rtlCol="0" anchor="ctr"/>
+          <a:lstStyle/>
+          <a:p>
+            <a:pPr algn="ctr"/>
+          </a:p>
+        </p:txBody>
+      </p:sp>
+      <p:sp>
+        <p:nvSpPr>
+          <p:cNvPr id="38" name="C1-E07 text 36" descr="sci-ppt:o036"/>
+          <p:cNvSpPr txBox="1"/>
+          <p:nvPr/>
+        </p:nvSpPr>
+        <p:spPr>
+          <a:xfrm>
+            <a:off x="10725466" y="1920239"/>
+            <a:ext cx="1371600" cy="223900"/>
+          </a:xfrm>
+          <a:prstGeom prst="rect">
+            <a:avLst/>
+          </a:prstGeom>
+          <a:noFill/>
+          <a:effectLst/>
+        </p:spPr>
+        <p:txBody>
+          <a:bodyPr wrap="none" lIns="18288" rIns="18288" tIns="18288" bIns="18288" anchor="t">
+            <a:spAutoFit/>
+          </a:bodyPr>
+          <a:lstStyle/>
+          <a:p>
+            <a:pPr algn="l">
+              <a:spcAft>
+                <a:spcPts val="0"/>
+              </a:spcAft>
+            </a:pPr>
+            <a:r>
+              <a:rPr sz="1150" b="0" i="0">
                 <a:solidFill>
                   <a:srgbClr val="E7F0F3"/>
                 </a:solidFill>
                 <a:latin typeface="Arial"/>
               </a:rPr>
-              <a:t>R(t)</a:t>
-            </a:r>
-          </a:p>
-        </p:txBody>
-      </p:sp>
-      <p:sp>
-        <p:nvSpPr>
-          <p:cNvPr id="6" name="text5" descr="sci-ppt:C1-E07-005"/>
+              <a:t>+158 kPa</a:t>
+            </a:r>
+          </a:p>
+        </p:txBody>
+      </p:sp>
+      <p:sp>
+        <p:nvSpPr>
+          <p:cNvPr id="39" name="C1-E07 text 37" descr="sci-ppt:o037"/>
           <p:cNvSpPr txBox="1"/>
           <p:nvPr/>
         </p:nvSpPr>
         <p:spPr>
           <a:xfrm>
-            <a:off x="2682240" y="2804160"/>
-            <a:ext cx="2194560" cy="377952"/>
+            <a:off x="7086600" y="2441448"/>
+            <a:ext cx="2103120" cy="231648"/>
           </a:xfrm>
           <a:prstGeom prst="rect">
             <a:avLst/>
@@ -3250,7 +5115,7 @@
           <a:effectLst/>
         </p:spPr>
         <p:txBody>
-          <a:bodyPr wrap="none" lIns="27432" rIns="27432" tIns="18288" bIns="18288" anchor="ctr">
+          <a:bodyPr wrap="none" lIns="18288" rIns="18288" tIns="18288" bIns="18288" anchor="t">
             <a:spAutoFit/>
           </a:bodyPr>
           <a:lstStyle/>
@@ -3261,27 +5126,99 @@
               </a:spcAft>
             </a:pPr>
             <a:r>
-              <a:rPr sz="1920" b="0" i="0">
+              <a:rPr sz="1200" b="1" i="0">
+                <a:solidFill>
+                  <a:srgbClr val="F2B880"/>
+                </a:solidFill>
+                <a:latin typeface="Arial"/>
+              </a:rPr>
+              <a:t>p_b − p∞</a:t>
+            </a:r>
+          </a:p>
+        </p:txBody>
+      </p:sp>
+      <p:sp>
+        <p:nvSpPr>
+          <p:cNvPr id="40" name="C1-E07 rect 38" descr="sci-ppt:o038"/>
+          <p:cNvSpPr/>
+          <p:nvPr/>
+        </p:nvSpPr>
+        <p:spPr>
+          <a:xfrm>
+            <a:off x="9509760" y="2468879"/>
+            <a:ext cx="1371600" cy="292608"/>
+          </a:xfrm>
+          <a:prstGeom prst="rect">
+            <a:avLst/>
+          </a:prstGeom>
+          <a:solidFill>
+            <a:srgbClr val="F2B880"/>
+          </a:solidFill>
+          <a:ln w="12700">
+            <a:solidFill>
+              <a:srgbClr val="F2B880"/>
+            </a:solidFill>
+          </a:ln>
+          <a:effectLst/>
+        </p:spPr>
+        <p:txBody>
+          <a:bodyPr rtlCol="0" anchor="ctr"/>
+          <a:lstStyle/>
+          <a:p>
+            <a:pPr algn="ctr"/>
+          </a:p>
+        </p:txBody>
+      </p:sp>
+      <p:sp>
+        <p:nvSpPr>
+          <p:cNvPr id="41" name="C1-E07 text 39" descr="sci-ppt:o039"/>
+          <p:cNvSpPr txBox="1"/>
+          <p:nvPr/>
+        </p:nvSpPr>
+        <p:spPr>
+          <a:xfrm>
+            <a:off x="10936224" y="2468879"/>
+            <a:ext cx="1371600" cy="223900"/>
+          </a:xfrm>
+          <a:prstGeom prst="rect">
+            <a:avLst/>
+          </a:prstGeom>
+          <a:noFill/>
+          <a:effectLst/>
+        </p:spPr>
+        <p:txBody>
+          <a:bodyPr wrap="none" lIns="18288" rIns="18288" tIns="18288" bIns="18288" anchor="t">
+            <a:spAutoFit/>
+          </a:bodyPr>
+          <a:lstStyle/>
+          <a:p>
+            <a:pPr algn="l">
+              <a:spcAft>
+                <a:spcPts val="0"/>
+              </a:spcAft>
+            </a:pPr>
+            <a:r>
+              <a:rPr sz="1150" b="0" i="0">
                 <a:solidFill>
                   <a:srgbClr val="E7F0F3"/>
                 </a:solidFill>
                 <a:latin typeface="Arial"/>
               </a:rPr>
-              <a:t>p_b</a:t>
-            </a:r>
-          </a:p>
-        </p:txBody>
-      </p:sp>
-      <p:sp>
-        <p:nvSpPr>
-          <p:cNvPr id="7" name="text6" descr="sci-ppt:C1-E07-006"/>
+              <a:t>+187 kPa</a:t>
+            </a:r>
+          </a:p>
+        </p:txBody>
+      </p:sp>
+      <p:sp>
+        <p:nvSpPr>
+          <p:cNvPr id="42" name="C1-E07 text 40" descr="sci-ppt:o040"/>
           <p:cNvSpPr txBox="1"/>
           <p:nvPr/>
         </p:nvSpPr>
         <p:spPr>
           <a:xfrm>
-            <a:off x="5242560" y="1524000"/>
-            <a:ext cx="4876800" cy="415747"/>
+            <a:off x="7086600" y="2990088"/>
+            <a:ext cx="2103120" cy="231648"/>
           </a:xfrm>
           <a:prstGeom prst="rect">
             <a:avLst/>
@@ -3290,7 +5227,7 @@
           <a:effectLst/>
         </p:spPr>
         <p:txBody>
-          <a:bodyPr wrap="none" lIns="27432" rIns="27432" tIns="18288" bIns="18288" anchor="ctr">
+          <a:bodyPr wrap="none" lIns="18288" rIns="18288" tIns="18288" bIns="18288" anchor="t">
             <a:spAutoFit/>
           </a:bodyPr>
           <a:lstStyle/>
@@ -3301,27 +5238,99 @@
               </a:spcAft>
             </a:pPr>
             <a:r>
-              <a:rPr sz="2111" b="0" i="0">
+              <a:rPr sz="1200" b="1" i="0">
+                <a:solidFill>
+                  <a:srgbClr val="F28BA0"/>
+                </a:solidFill>
+                <a:latin typeface="Arial"/>
+              </a:rPr>
+              <a:t>−2σ/R</a:t>
+            </a:r>
+          </a:p>
+        </p:txBody>
+      </p:sp>
+      <p:sp>
+        <p:nvSpPr>
+          <p:cNvPr id="43" name="C1-E07 rect 41" descr="sci-ppt:o041"/>
+          <p:cNvSpPr/>
+          <p:nvPr/>
+        </p:nvSpPr>
+        <p:spPr>
+          <a:xfrm>
+            <a:off x="9352853" y="3017520"/>
+            <a:ext cx="156906" cy="292608"/>
+          </a:xfrm>
+          <a:prstGeom prst="rect">
+            <a:avLst/>
+          </a:prstGeom>
+          <a:solidFill>
+            <a:srgbClr val="F28BA0"/>
+          </a:solidFill>
+          <a:ln w="12700">
+            <a:solidFill>
+              <a:srgbClr val="F28BA0"/>
+            </a:solidFill>
+          </a:ln>
+          <a:effectLst/>
+        </p:spPr>
+        <p:txBody>
+          <a:bodyPr rtlCol="0" anchor="ctr"/>
+          <a:lstStyle/>
+          <a:p>
+            <a:pPr algn="ctr"/>
+          </a:p>
+        </p:txBody>
+      </p:sp>
+      <p:sp>
+        <p:nvSpPr>
+          <p:cNvPr id="44" name="C1-E07 text 42" descr="sci-ppt:o042"/>
+          <p:cNvSpPr txBox="1"/>
+          <p:nvPr/>
+        </p:nvSpPr>
+        <p:spPr>
+          <a:xfrm>
+            <a:off x="9582912" y="3017520"/>
+            <a:ext cx="1371600" cy="223900"/>
+          </a:xfrm>
+          <a:prstGeom prst="rect">
+            <a:avLst/>
+          </a:prstGeom>
+          <a:noFill/>
+          <a:effectLst/>
+        </p:spPr>
+        <p:txBody>
+          <a:bodyPr wrap="none" lIns="18288" rIns="18288" tIns="18288" bIns="18288" anchor="t">
+            <a:spAutoFit/>
+          </a:bodyPr>
+          <a:lstStyle/>
+          <a:p>
+            <a:pPr algn="l">
+              <a:spcAft>
+                <a:spcPts val="0"/>
+              </a:spcAft>
+            </a:pPr>
+            <a:r>
+              <a:rPr sz="1150" b="0" i="0">
                 <a:solidFill>
                   <a:srgbClr val="E7F0F3"/>
                 </a:solidFill>
                 <a:latin typeface="Arial"/>
               </a:rPr>
-              <a:t>Surrounding liquid</a:t>
-            </a:r>
-          </a:p>
-        </p:txBody>
-      </p:sp>
-      <p:sp>
-        <p:nvSpPr>
-          <p:cNvPr id="8" name="text7" descr="sci-ppt:C1-E07-007"/>
+              <a:t>-21 kPa</a:t>
+            </a:r>
+          </a:p>
+        </p:txBody>
+      </p:sp>
+      <p:sp>
+        <p:nvSpPr>
+          <p:cNvPr id="45" name="C1-E07 text 43" descr="sci-ppt:o043"/>
           <p:cNvSpPr txBox="1"/>
           <p:nvPr/>
         </p:nvSpPr>
         <p:spPr>
           <a:xfrm>
-            <a:off x="5242560" y="1987296"/>
-            <a:ext cx="5852160" cy="359054"/>
+            <a:off x="7086600" y="3538727"/>
+            <a:ext cx="2103120" cy="231648"/>
           </a:xfrm>
           <a:prstGeom prst="rect">
             <a:avLst/>
@@ -3330,7 +5339,7 @@
           <a:effectLst/>
         </p:spPr>
         <p:txBody>
-          <a:bodyPr wrap="none" lIns="27432" rIns="27432" tIns="18288" bIns="18288" anchor="ctr">
+          <a:bodyPr wrap="none" lIns="18288" rIns="18288" tIns="18288" bIns="18288" anchor="t">
             <a:spAutoFit/>
           </a:bodyPr>
           <a:lstStyle/>
@@ -3341,51 +5350,99 @@
               </a:spcAft>
             </a:pPr>
             <a:r>
-              <a:rPr sz="1823" b="0" i="0">
+              <a:rPr sz="1200" b="1" i="0">
+                <a:solidFill>
+                  <a:srgbClr val="7FC8F8"/>
+                </a:solidFill>
+                <a:latin typeface="Arial"/>
+              </a:rPr>
+              <a:t>−4μṘ/R</a:t>
+            </a:r>
+          </a:p>
+        </p:txBody>
+      </p:sp>
+      <p:sp>
+        <p:nvSpPr>
+          <p:cNvPr id="46" name="C1-E07 rect 44" descr="sci-ppt:o044"/>
+          <p:cNvSpPr/>
+          <p:nvPr/>
+        </p:nvSpPr>
+        <p:spPr>
+          <a:xfrm>
+            <a:off x="9455885" y="3566159"/>
+            <a:ext cx="53874" cy="292608"/>
+          </a:xfrm>
+          <a:prstGeom prst="rect">
+            <a:avLst/>
+          </a:prstGeom>
+          <a:solidFill>
+            <a:srgbClr val="7FC8F8"/>
+          </a:solidFill>
+          <a:ln w="12700">
+            <a:solidFill>
+              <a:srgbClr val="7FC8F8"/>
+            </a:solidFill>
+          </a:ln>
+          <a:effectLst/>
+        </p:spPr>
+        <p:txBody>
+          <a:bodyPr rtlCol="0" anchor="ctr"/>
+          <a:lstStyle/>
+          <a:p>
+            <a:pPr algn="ctr"/>
+          </a:p>
+        </p:txBody>
+      </p:sp>
+      <p:sp>
+        <p:nvSpPr>
+          <p:cNvPr id="47" name="C1-E07 text 45" descr="sci-ppt:o045"/>
+          <p:cNvSpPr txBox="1"/>
+          <p:nvPr/>
+        </p:nvSpPr>
+        <p:spPr>
+          <a:xfrm>
+            <a:off x="9582912" y="3566159"/>
+            <a:ext cx="1371600" cy="223900"/>
+          </a:xfrm>
+          <a:prstGeom prst="rect">
+            <a:avLst/>
+          </a:prstGeom>
+          <a:noFill/>
+          <a:effectLst/>
+        </p:spPr>
+        <p:txBody>
+          <a:bodyPr wrap="none" lIns="18288" rIns="18288" tIns="18288" bIns="18288" anchor="t">
+            <a:spAutoFit/>
+          </a:bodyPr>
+          <a:lstStyle/>
+          <a:p>
+            <a:pPr algn="l">
+              <a:spcAft>
+                <a:spcPts val="0"/>
+              </a:spcAft>
+            </a:pPr>
+            <a:r>
+              <a:rPr sz="1150" b="0" i="0">
                 <a:solidFill>
                   <a:srgbClr val="E7F0F3"/>
                 </a:solidFill>
                 <a:latin typeface="Arial"/>
               </a:rPr>
-              <a:t>p∞, ρ, μ; interface: σ</a:t>
-            </a:r>
-          </a:p>
-        </p:txBody>
-      </p:sp>
-      <p:cxnSp>
-        <p:nvCxnSpPr>
-          <p:cNvPr id="9" name="arrow8" descr="sci-ppt:C1-E07-008"/>
-          <p:cNvCxnSpPr/>
-          <p:nvPr/>
-        </p:nvCxnSpPr>
-        <p:spPr>
-          <a:xfrm>
-            <a:off x="3291840" y="2621280"/>
-            <a:ext cx="1706880" cy="1158240"/>
-          </a:xfrm>
-          <a:prstGeom prst="line">
-            <a:avLst/>
-          </a:prstGeom>
-          <a:ln w="25400">
-            <a:solidFill>
-              <a:srgbClr val="8EDBD4"/>
-            </a:solidFill>
-            <a:headEnd type="none" w="med" len="med"/>
-            <a:tailEnd type="triangle" w="med" len="med"/>
-          </a:ln>
-          <a:effectLst/>
-        </p:spPr>
-      </p:cxnSp>
-      <p:sp>
-        <p:nvSpPr>
-          <p:cNvPr id="10" name="text9" descr="sci-ppt:C1-E07-009"/>
+              <a:t>-7 kPa</a:t>
+            </a:r>
+          </a:p>
+        </p:txBody>
+      </p:sp>
+      <p:sp>
+        <p:nvSpPr>
+          <p:cNvPr id="48" name="C1-E07 text 46" descr="sci-ppt:o046"/>
           <p:cNvSpPr txBox="1"/>
           <p:nvPr/>
         </p:nvSpPr>
         <p:spPr>
           <a:xfrm>
-            <a:off x="5364480" y="3657600"/>
-            <a:ext cx="1950720" cy="340156"/>
+            <a:off x="7086600" y="4160520"/>
+            <a:ext cx="4572000" cy="386588"/>
           </a:xfrm>
           <a:prstGeom prst="rect">
             <a:avLst/>
@@ -3394,7 +5451,7 @@
           <a:effectLst/>
         </p:spPr>
         <p:txBody>
-          <a:bodyPr wrap="none" lIns="27432" rIns="27432" tIns="18288" bIns="18288" anchor="ctr">
+          <a:bodyPr wrap="none" lIns="18288" rIns="18288" tIns="18288" bIns="18288" anchor="t">
             <a:spAutoFit/>
           </a:bodyPr>
           <a:lstStyle/>
@@ -3405,51 +5462,83 @@
               </a:spcAft>
             </a:pPr>
             <a:r>
-              <a:rPr sz="1728" b="0" i="0">
+              <a:rPr sz="1100" b="0" i="0">
+                <a:solidFill>
+                  <a:srgbClr val="B4C7D2"/>
+                </a:solidFill>
+                <a:latin typeface="Arial"/>
+              </a:rPr>
+              <a:t>t = 0.18 µs.  Left side from finite-difference R̈ of the</a:t>
+            </a:r>
+          </a:p>
+          <a:p>
+            <a:pPr algn="l">
+              <a:spcAft>
+                <a:spcPts val="0"/>
+              </a:spcAft>
+            </a:pPr>
+            <a:r>
+              <a:rPr sz="1100" b="0" i="0">
+                <a:solidFill>
+                  <a:srgbClr val="B4C7D2"/>
+                </a:solidFill>
+                <a:latin typeface="Arial"/>
+              </a:rPr>
+              <a:t>solution; right side from the pressures.  Mismatch 0.0 %.</a:t>
+            </a:r>
+          </a:p>
+        </p:txBody>
+      </p:sp>
+      <p:sp>
+        <p:nvSpPr>
+          <p:cNvPr id="49" name="C1-E07 text 47" descr="sci-ppt:o047"/>
+          <p:cNvSpPr txBox="1"/>
+          <p:nvPr/>
+        </p:nvSpPr>
+        <p:spPr>
+          <a:xfrm>
+            <a:off x="868680" y="5669280"/>
+            <a:ext cx="10972800" cy="254889"/>
+          </a:xfrm>
+          <a:prstGeom prst="rect">
+            <a:avLst/>
+          </a:prstGeom>
+          <a:noFill/>
+          <a:effectLst/>
+        </p:spPr>
+        <p:txBody>
+          <a:bodyPr wrap="none" lIns="18288" rIns="18288" tIns="18288" bIns="18288" anchor="t">
+            <a:spAutoFit/>
+          </a:bodyPr>
+          <a:lstStyle/>
+          <a:p>
+            <a:pPr algn="l">
+              <a:spcAft>
+                <a:spcPts val="0"/>
+              </a:spcAft>
+            </a:pPr>
+            <a:r>
+              <a:rPr sz="1350" b="0" i="0">
                 <a:solidFill>
                   <a:srgbClr val="E7F0F3"/>
                 </a:solidFill>
                 <a:latin typeface="Arial"/>
               </a:rPr>
-              <a:t>r ≥ R</a:t>
-            </a:r>
-          </a:p>
-        </p:txBody>
-      </p:sp>
-      <p:cxnSp>
-        <p:nvCxnSpPr>
-          <p:cNvPr id="11" name="arrow10" descr="sci-ppt:C1-E07-010"/>
-          <p:cNvCxnSpPr/>
-          <p:nvPr/>
-        </p:nvCxnSpPr>
-        <p:spPr>
-          <a:xfrm>
-            <a:off x="4998720" y="2621280"/>
-            <a:ext cx="792480" cy="0"/>
-          </a:xfrm>
-          <a:prstGeom prst="line">
-            <a:avLst/>
-          </a:prstGeom>
-          <a:ln w="25400">
-            <a:solidFill>
-              <a:srgbClr val="8EDBD4"/>
-            </a:solidFill>
-            <a:headEnd type="none" w="med" len="med"/>
-            <a:tailEnd type="triangle" w="med" len="med"/>
-          </a:ln>
-          <a:effectLst/>
-        </p:spPr>
-      </p:cxnSp>
-      <p:sp>
-        <p:nvSpPr>
-          <p:cNvPr id="12" name="text11" descr="sci-ppt:C1-E07-011"/>
+              <a:t>One scalar equation for R(t): liquid inertia on the left, driving and resisting pressures on the right.</a:t>
+            </a:r>
+          </a:p>
+        </p:txBody>
+      </p:sp>
+      <p:sp>
+        <p:nvSpPr>
+          <p:cNvPr id="50" name="C1-E07 text 48" descr="sci-ppt:o048"/>
           <p:cNvSpPr txBox="1"/>
           <p:nvPr/>
         </p:nvSpPr>
         <p:spPr>
           <a:xfrm>
-            <a:off x="5059680" y="2865120"/>
-            <a:ext cx="3291840" cy="321259"/>
+            <a:off x="868680" y="6035040"/>
+            <a:ext cx="10972800" cy="223900"/>
           </a:xfrm>
           <a:prstGeom prst="rect">
             <a:avLst/>
@@ -3458,7 +5547,7 @@
           <a:effectLst/>
         </p:spPr>
         <p:txBody>
-          <a:bodyPr wrap="none" lIns="27432" rIns="27432" tIns="18288" bIns="18288" anchor="ctr">
+          <a:bodyPr wrap="none" lIns="18288" rIns="18288" tIns="18288" bIns="18288" anchor="t">
             <a:spAutoFit/>
           </a:bodyPr>
           <a:lstStyle/>
@@ -3469,27 +5558,27 @@
               </a:spcAft>
             </a:pPr>
             <a:r>
-              <a:rPr sz="1632" b="0" i="0">
+              <a:rPr sz="1150" b="0" i="0">
                 <a:solidFill>
-                  <a:srgbClr val="E7F0F3"/>
+                  <a:srgbClr val="B4C7D2"/>
                 </a:solidFill>
                 <a:latin typeface="Arial"/>
               </a:rPr>
-              <a:t>+e_r (coordinate)</a:t>
-            </a:r>
-          </a:p>
-        </p:txBody>
-      </p:sp>
-      <p:sp>
-        <p:nvSpPr>
-          <p:cNvPr id="13" name="text12" descr="sci-ppt:C1-E07-012"/>
+              <a:t>Gas pressure here is polytropic, p_b = p_g0 (R₀/R)^{3γ}, γ = 1.4, p_g0 = 1 MPa: an illustration of the closure still to be supplied.</a:t>
+            </a:r>
+          </a:p>
+        </p:txBody>
+      </p:sp>
+      <p:sp>
+        <p:nvSpPr>
+          <p:cNvPr id="51" name="C1-E07 text 49" descr="sci-ppt:o049"/>
           <p:cNvSpPr txBox="1"/>
           <p:nvPr/>
         </p:nvSpPr>
         <p:spPr>
           <a:xfrm>
-            <a:off x="1219200" y="4206240"/>
-            <a:ext cx="9753600" cy="340156"/>
+            <a:off x="320040" y="6510528"/>
+            <a:ext cx="11521440" cy="200660"/>
           </a:xfrm>
           <a:prstGeom prst="rect">
             <a:avLst/>
@@ -3498,7 +5587,7 @@
           <a:effectLst/>
         </p:spPr>
         <p:txBody>
-          <a:bodyPr wrap="none" lIns="27432" rIns="27432" tIns="18288" bIns="18288" anchor="ctr">
+          <a:bodyPr wrap="none" lIns="18288" rIns="18288" tIns="18288" bIns="18288" anchor="t">
             <a:spAutoFit/>
           </a:bodyPr>
           <a:lstStyle/>
@@ -3509,413 +5598,13 @@
               </a:spcAft>
             </a:pPr>
             <a:r>
-              <a:rPr sz="1728" b="0" i="0">
-                <a:solidFill>
-                  <a:srgbClr val="E7F0F3"/>
-                </a:solidFill>
-                <a:latin typeface="Arial"/>
-              </a:rPr>
-              <a:t>Signed wall speed: Ṙ; acceleration: R̈</a:t>
-            </a:r>
-          </a:p>
-        </p:txBody>
-      </p:sp>
-      <p:sp>
-        <p:nvSpPr>
-          <p:cNvPr id="14" name="text13" descr="sci-ppt:C1-E07-013"/>
-          <p:cNvSpPr txBox="1"/>
-          <p:nvPr/>
-        </p:nvSpPr>
-        <p:spPr>
-          <a:xfrm>
-            <a:off x="365760" y="4974336"/>
-            <a:ext cx="5547360" cy="321259"/>
-          </a:xfrm>
-          <a:prstGeom prst="rect">
-            <a:avLst/>
-          </a:prstGeom>
-          <a:noFill/>
-          <a:effectLst/>
-        </p:spPr>
-        <p:txBody>
-          <a:bodyPr wrap="none" lIns="27432" rIns="27432" tIns="18288" bIns="18288" anchor="ctr">
-            <a:spAutoFit/>
-          </a:bodyPr>
-          <a:lstStyle/>
-          <a:p>
-            <a:pPr algn="l">
-              <a:spcAft>
-                <a:spcPts val="0"/>
-              </a:spcAft>
-            </a:pPr>
-            <a:r>
-              <a:rPr sz="1632" b="0" i="0">
-                <a:solidFill>
-                  <a:srgbClr val="E7F0F3"/>
-                </a:solidFill>
-                <a:latin typeface="Arial"/>
-              </a:rPr>
-              <a:t>ρ carrier</a:t>
-            </a:r>
-          </a:p>
-        </p:txBody>
-      </p:sp>
-      <p:sp>
-        <p:nvSpPr>
-          <p:cNvPr id="15" name="text14" descr="sci-ppt:C1-E07-014"/>
-          <p:cNvSpPr txBox="1"/>
-          <p:nvPr/>
-        </p:nvSpPr>
-        <p:spPr>
-          <a:xfrm>
-            <a:off x="365760" y="5266944"/>
-            <a:ext cx="5547360" cy="321259"/>
-          </a:xfrm>
-          <a:prstGeom prst="rect">
-            <a:avLst/>
-          </a:prstGeom>
-          <a:noFill/>
-          <a:effectLst/>
-        </p:spPr>
-        <p:txBody>
-          <a:bodyPr wrap="none" lIns="27432" rIns="27432" tIns="18288" bIns="18288" anchor="ctr">
-            <a:spAutoFit/>
-          </a:bodyPr>
-          <a:lstStyle/>
-          <a:p>
-            <a:pPr algn="l">
-              <a:spcAft>
-                <a:spcPts val="0"/>
-              </a:spcAft>
-            </a:pPr>
-            <a:r>
-              <a:rPr sz="1632" b="0" i="0">
-                <a:solidFill>
-                  <a:srgbClr val="E7F0F3"/>
-                </a:solidFill>
-                <a:latin typeface="Arial"/>
-              </a:rPr>
-              <a:t>Ṙ</a:t>
-            </a:r>
-          </a:p>
-        </p:txBody>
-      </p:sp>
-      <p:sp>
-        <p:nvSpPr>
-          <p:cNvPr id="16" name="text15" descr="sci-ppt:C1-E07-015"/>
-          <p:cNvSpPr txBox="1"/>
-          <p:nvPr/>
-        </p:nvSpPr>
-        <p:spPr>
-          <a:xfrm>
-            <a:off x="365760" y="5559552"/>
-            <a:ext cx="5547360" cy="321259"/>
-          </a:xfrm>
-          <a:prstGeom prst="rect">
-            <a:avLst/>
-          </a:prstGeom>
-          <a:noFill/>
-          <a:effectLst/>
-        </p:spPr>
-        <p:txBody>
-          <a:bodyPr wrap="none" lIns="27432" rIns="27432" tIns="18288" bIns="18288" anchor="ctr">
-            <a:spAutoFit/>
-          </a:bodyPr>
-          <a:lstStyle/>
-          <a:p>
-            <a:pPr algn="l">
-              <a:spcAft>
-                <a:spcPts val="0"/>
-              </a:spcAft>
-            </a:pPr>
-            <a:r>
-              <a:rPr sz="1632" b="0" i="0">
-                <a:solidFill>
-                  <a:srgbClr val="E7F0F3"/>
-                </a:solidFill>
-                <a:latin typeface="Arial"/>
-              </a:rPr>
-              <a:t>pb</a:t>
-            </a:r>
-          </a:p>
-        </p:txBody>
-      </p:sp>
-      <p:sp>
-        <p:nvSpPr>
-          <p:cNvPr id="17" name="text16" descr="sci-ppt:C1-E07-016"/>
-          <p:cNvSpPr txBox="1"/>
-          <p:nvPr/>
-        </p:nvSpPr>
-        <p:spPr>
-          <a:xfrm>
-            <a:off x="365760" y="5852160"/>
-            <a:ext cx="5547360" cy="321259"/>
-          </a:xfrm>
-          <a:prstGeom prst="rect">
-            <a:avLst/>
-          </a:prstGeom>
-          <a:noFill/>
-          <a:effectLst/>
-        </p:spPr>
-        <p:txBody>
-          <a:bodyPr wrap="none" lIns="27432" rIns="27432" tIns="18288" bIns="18288" anchor="ctr">
-            <a:spAutoFit/>
-          </a:bodyPr>
-          <a:lstStyle/>
-          <a:p>
-            <a:pPr algn="l">
-              <a:spcAft>
-                <a:spcPts val="0"/>
-              </a:spcAft>
-            </a:pPr>
-            <a:r>
-              <a:rPr sz="1632" b="0" i="0">
-                <a:solidFill>
-                  <a:srgbClr val="E7F0F3"/>
-                </a:solidFill>
-                <a:latin typeface="Arial"/>
-              </a:rPr>
-              <a:t>2σ/R</a:t>
-            </a:r>
-          </a:p>
-        </p:txBody>
-      </p:sp>
-      <p:sp>
-        <p:nvSpPr>
-          <p:cNvPr id="18" name="text17" descr="sci-ppt:C1-E07-017"/>
-          <p:cNvSpPr txBox="1"/>
-          <p:nvPr/>
-        </p:nvSpPr>
-        <p:spPr>
-          <a:xfrm>
-            <a:off x="6156960" y="4974336"/>
-            <a:ext cx="5547360" cy="321259"/>
-          </a:xfrm>
-          <a:prstGeom prst="rect">
-            <a:avLst/>
-          </a:prstGeom>
-          <a:noFill/>
-          <a:effectLst/>
-        </p:spPr>
-        <p:txBody>
-          <a:bodyPr wrap="none" lIns="27432" rIns="27432" tIns="18288" bIns="18288" anchor="ctr">
-            <a:spAutoFit/>
-          </a:bodyPr>
-          <a:lstStyle/>
-          <a:p>
-            <a:pPr algn="l">
-              <a:spcAft>
-                <a:spcPts val="0"/>
-              </a:spcAft>
-            </a:pPr>
-            <a:r>
-              <a:rPr sz="1632" b="0" i="0">
-                <a:solidFill>
-                  <a:srgbClr val="E7F0F3"/>
-                </a:solidFill>
-                <a:latin typeface="Arial"/>
-              </a:rPr>
-              <a:t>R</a:t>
-            </a:r>
-          </a:p>
-        </p:txBody>
-      </p:sp>
-      <p:sp>
-        <p:nvSpPr>
-          <p:cNvPr id="19" name="text18" descr="sci-ppt:C1-E07-018"/>
-          <p:cNvSpPr txBox="1"/>
-          <p:nvPr/>
-        </p:nvSpPr>
-        <p:spPr>
-          <a:xfrm>
-            <a:off x="6156960" y="5266944"/>
-            <a:ext cx="5547360" cy="321259"/>
-          </a:xfrm>
-          <a:prstGeom prst="rect">
-            <a:avLst/>
-          </a:prstGeom>
-          <a:noFill/>
-          <a:effectLst/>
-        </p:spPr>
-        <p:txBody>
-          <a:bodyPr wrap="none" lIns="27432" rIns="27432" tIns="18288" bIns="18288" anchor="ctr">
-            <a:spAutoFit/>
-          </a:bodyPr>
-          <a:lstStyle/>
-          <a:p>
-            <a:pPr algn="l">
-              <a:spcAft>
-                <a:spcPts val="0"/>
-              </a:spcAft>
-            </a:pPr>
-            <a:r>
-              <a:rPr sz="1632" b="0" i="0">
-                <a:solidFill>
-                  <a:srgbClr val="E7F0F3"/>
-                </a:solidFill>
-                <a:latin typeface="Arial"/>
-              </a:rPr>
-              <a:t>R̈</a:t>
-            </a:r>
-          </a:p>
-        </p:txBody>
-      </p:sp>
-      <p:sp>
-        <p:nvSpPr>
-          <p:cNvPr id="20" name="text19" descr="sci-ppt:C1-E07-019"/>
-          <p:cNvSpPr txBox="1"/>
-          <p:nvPr/>
-        </p:nvSpPr>
-        <p:spPr>
-          <a:xfrm>
-            <a:off x="6156960" y="5559552"/>
-            <a:ext cx="5547360" cy="321259"/>
-          </a:xfrm>
-          <a:prstGeom prst="rect">
-            <a:avLst/>
-          </a:prstGeom>
-          <a:noFill/>
-          <a:effectLst/>
-        </p:spPr>
-        <p:txBody>
-          <a:bodyPr wrap="none" lIns="27432" rIns="27432" tIns="18288" bIns="18288" anchor="ctr">
-            <a:spAutoFit/>
-          </a:bodyPr>
-          <a:lstStyle/>
-          <a:p>
-            <a:pPr algn="l">
-              <a:spcAft>
-                <a:spcPts val="0"/>
-              </a:spcAft>
-            </a:pPr>
-            <a:r>
-              <a:rPr sz="1632" b="0" i="0">
-                <a:solidFill>
-                  <a:srgbClr val="E7F0F3"/>
-                </a:solidFill>
-                <a:latin typeface="Arial"/>
-              </a:rPr>
-              <a:t>p∞</a:t>
-            </a:r>
-          </a:p>
-        </p:txBody>
-      </p:sp>
-      <p:sp>
-        <p:nvSpPr>
-          <p:cNvPr id="21" name="text20" descr="sci-ppt:C1-E07-020"/>
-          <p:cNvSpPr txBox="1"/>
-          <p:nvPr/>
-        </p:nvSpPr>
-        <p:spPr>
-          <a:xfrm>
-            <a:off x="6156960" y="5852160"/>
-            <a:ext cx="5547360" cy="321259"/>
-          </a:xfrm>
-          <a:prstGeom prst="rect">
-            <a:avLst/>
-          </a:prstGeom>
-          <a:noFill/>
-          <a:effectLst/>
-        </p:spPr>
-        <p:txBody>
-          <a:bodyPr wrap="none" lIns="27432" rIns="27432" tIns="18288" bIns="18288" anchor="ctr">
-            <a:spAutoFit/>
-          </a:bodyPr>
-          <a:lstStyle/>
-          <a:p>
-            <a:pPr algn="l">
-              <a:spcAft>
-                <a:spcPts val="0"/>
-              </a:spcAft>
-            </a:pPr>
-            <a:r>
-              <a:rPr sz="1632" b="0" i="0">
-                <a:solidFill>
-                  <a:srgbClr val="E7F0F3"/>
-                </a:solidFill>
-                <a:latin typeface="Arial"/>
-              </a:rPr>
-              <a:t>4μṘ/R</a:t>
-            </a:r>
-          </a:p>
-        </p:txBody>
-      </p:sp>
-      <p:sp>
-        <p:nvSpPr>
-          <p:cNvPr id="22" name="text21" descr="sci-ppt:C1-E07-021"/>
-          <p:cNvSpPr txBox="1"/>
-          <p:nvPr/>
-        </p:nvSpPr>
-        <p:spPr>
-          <a:xfrm>
-            <a:off x="365760" y="6339840"/>
-            <a:ext cx="11277600" cy="302361"/>
-          </a:xfrm>
-          <a:prstGeom prst="rect">
-            <a:avLst/>
-          </a:prstGeom>
-          <a:noFill/>
-          <a:effectLst/>
-        </p:spPr>
-        <p:txBody>
-          <a:bodyPr wrap="none" lIns="27432" rIns="27432" tIns="18288" bIns="18288" anchor="ctr">
-            <a:spAutoFit/>
-          </a:bodyPr>
-          <a:lstStyle/>
-          <a:p>
-            <a:pPr algn="l">
-              <a:spcAft>
-                <a:spcPts val="0"/>
-              </a:spcAft>
-            </a:pPr>
-            <a:r>
-              <a:rPr sz="1536" b="0" i="0">
+              <a:rPr sz="1000" b="0" i="0">
                 <a:solidFill>
                   <a:srgbClr val="B4C7D2"/>
                 </a:solidFill>
                 <a:latin typeface="Arial"/>
               </a:rPr>
-              <a:t>Outward is positive</a:t>
-            </a:r>
-          </a:p>
-        </p:txBody>
-      </p:sp>
-      <p:sp>
-        <p:nvSpPr>
-          <p:cNvPr id="23" name="text22" descr="sci-ppt:C1-E07-022"/>
-          <p:cNvSpPr txBox="1"/>
-          <p:nvPr/>
-        </p:nvSpPr>
-        <p:spPr>
-          <a:xfrm>
-            <a:off x="365760" y="6632448"/>
-            <a:ext cx="11277600" cy="302361"/>
-          </a:xfrm>
-          <a:prstGeom prst="rect">
-            <a:avLst/>
-          </a:prstGeom>
-          <a:noFill/>
-          <a:effectLst/>
-        </p:spPr>
-        <p:txBody>
-          <a:bodyPr wrap="none" lIns="27432" rIns="27432" tIns="18288" bIns="18288" anchor="ctr">
-            <a:spAutoFit/>
-          </a:bodyPr>
-          <a:lstStyle/>
-          <a:p>
-            <a:pPr algn="l">
-              <a:spcAft>
-                <a:spcPts val="0"/>
-              </a:spcAft>
-            </a:pPr>
-            <a:r>
-              <a:rPr sz="1536" b="0" i="0">
-                <a:solidFill>
-                  <a:srgbClr val="B4C7D2"/>
-                </a:solidFill>
-                <a:latin typeface="Arial"/>
-              </a:rPr>
-              <a:t>The equation predicts radius, not jet shape</a:t>
+              <a:t>Numerical integration of Eq. C1-E07; R₀ = 5 µm, ρ = 1000 kg/m³, p∞ = 101.3 kPa, σ = 0.072 N/m, μ = 1 mPa·s.</a:t>
             </a:r>
           </a:p>
         </p:txBody>
